--- a/Razonamiento probabilístico/PPTXs/redes-bayesianas.pptx
+++ b/Razonamiento probabilístico/PPTXs/redes-bayesianas.pptx
@@ -5,23 +5,21 @@
     <p:sldMasterId id="2147483648" r:id="rId1"/>
   </p:sldMasterIdLst>
   <p:sldIdLst>
-    <p:sldId id="256" r:id="rId7"/>
-    <p:sldId id="257" r:id="rId8"/>
-    <p:sldId id="258" r:id="rId9"/>
-    <p:sldId id="259" r:id="rId10"/>
-    <p:sldId id="260" r:id="rId11"/>
-    <p:sldId id="261" r:id="rId12"/>
-    <p:sldId id="262" r:id="rId13"/>
-    <p:sldId id="263" r:id="rId14"/>
-    <p:sldId id="264" r:id="rId15"/>
-    <p:sldId id="265" r:id="rId16"/>
-    <p:sldId id="266" r:id="rId17"/>
-    <p:sldId id="267" r:id="rId18"/>
-    <p:sldId id="268" r:id="rId19"/>
-    <p:sldId id="269" r:id="rId20"/>
-    <p:sldId id="270" r:id="rId21"/>
+    <p:sldId id="256" r:id="rId2"/>
+    <p:sldId id="257" r:id="rId3"/>
+    <p:sldId id="258" r:id="rId4"/>
+    <p:sldId id="259" r:id="rId5"/>
+    <p:sldId id="260" r:id="rId6"/>
+    <p:sldId id="261" r:id="rId7"/>
+    <p:sldId id="262" r:id="rId8"/>
+    <p:sldId id="263" r:id="rId9"/>
+    <p:sldId id="264" r:id="rId10"/>
+    <p:sldId id="265" r:id="rId11"/>
+    <p:sldId id="267" r:id="rId12"/>
+    <p:sldId id="268" r:id="rId13"/>
+    <p:sldId id="269" r:id="rId14"/>
   </p:sldIdLst>
-  <p:sldSz cx="12191999" cy="6858000" type="screen4x3"/>
+  <p:sldSz cx="12192000" cy="6858000"/>
   <p:notesSz cx="6858000" cy="9144000"/>
   <p:defaultTextStyle>
     <a:defPPr>
@@ -118,6 +116,22 @@
       </a:defRPr>
     </a:lvl9pPr>
   </p:defaultTextStyle>
+  <p:extLst>
+    <p:ext uri="{EFAFB233-063F-42B5-8137-9DF3F51BA10A}">
+      <p15:sldGuideLst xmlns:p15="http://schemas.microsoft.com/office/powerpoint/2012/main">
+        <p15:guide id="1" orient="horz" pos="2160">
+          <p15:clr>
+            <a:srgbClr val="A4A3A4"/>
+          </p15:clr>
+        </p15:guide>
+        <p15:guide id="2" pos="2880">
+          <p15:clr>
+            <a:srgbClr val="A4A3A4"/>
+          </p15:clr>
+        </p15:guide>
+      </p15:sldGuideLst>
+    </p:ext>
+  </p:extLst>
 </p:presentation>
 </file>
 
@@ -159,10 +173,9 @@
           <a:lstStyle/>
           <a:p>
             <a:r>
-              <a:rPr lang="en-US" smtClean="0"/>
+              <a:rPr lang="en-US"/>
               <a:t>Click to edit Master title style</a:t>
             </a:r>
-            <a:endParaRPr lang="en-US"/>
           </a:p>
         </p:txBody>
       </p:sp>
@@ -278,10 +291,9 @@
           </a:lstStyle>
           <a:p>
             <a:r>
-              <a:rPr lang="en-US" smtClean="0"/>
+              <a:rPr lang="en-US"/>
               <a:t>Click to edit Master subtitle style</a:t>
             </a:r>
-            <a:endParaRPr lang="en-US"/>
           </a:p>
         </p:txBody>
       </p:sp>
@@ -302,7 +314,7 @@
           <a:p>
             <a:fld id="{5BCAD085-E8A6-8845-BD4E-CB4CCA059FC4}" type="datetimeFigureOut">
               <a:rPr lang="en-US" smtClean="0"/>
-              <a:t>1/27/13</a:t>
+              <a:t>10/28/26</a:t>
             </a:fld>
             <a:endParaRPr lang="en-US"/>
           </a:p>
@@ -344,7 +356,7 @@
           <a:p>
             <a:fld id="{C1FF6DA9-008F-8B48-92A6-B652298478BF}" type="slidenum">
               <a:rPr lang="en-US" smtClean="0"/>
-              <a:t>‹#›</a:t>
+              <a:t>‹Nº›</a:t>
             </a:fld>
             <a:endParaRPr lang="en-US"/>
           </a:p>
@@ -396,10 +408,9 @@
           <a:lstStyle/>
           <a:p>
             <a:r>
-              <a:rPr lang="en-US" smtClean="0"/>
+              <a:rPr lang="en-US"/>
               <a:t>Click to edit Master title style</a:t>
             </a:r>
-            <a:endParaRPr lang="en-US"/>
           </a:p>
         </p:txBody>
       </p:sp>
@@ -420,38 +431,37 @@
           <a:p>
             <a:pPr lvl="0"/>
             <a:r>
-              <a:rPr lang="en-US" smtClean="0"/>
+              <a:rPr lang="en-US"/>
               <a:t>Click to edit Master text styles</a:t>
             </a:r>
           </a:p>
           <a:p>
             <a:pPr lvl="1"/>
             <a:r>
-              <a:rPr lang="en-US" smtClean="0"/>
+              <a:rPr lang="en-US"/>
               <a:t>Second level</a:t>
             </a:r>
           </a:p>
           <a:p>
             <a:pPr lvl="2"/>
             <a:r>
-              <a:rPr lang="en-US" smtClean="0"/>
+              <a:rPr lang="en-US"/>
               <a:t>Third level</a:t>
             </a:r>
           </a:p>
           <a:p>
             <a:pPr lvl="3"/>
             <a:r>
-              <a:rPr lang="en-US" smtClean="0"/>
+              <a:rPr lang="en-US"/>
               <a:t>Fourth level</a:t>
             </a:r>
           </a:p>
           <a:p>
             <a:pPr lvl="4"/>
             <a:r>
-              <a:rPr lang="en-US" smtClean="0"/>
+              <a:rPr lang="en-US"/>
               <a:t>Fifth level</a:t>
             </a:r>
-            <a:endParaRPr lang="en-US"/>
           </a:p>
         </p:txBody>
       </p:sp>
@@ -472,7 +482,7 @@
           <a:p>
             <a:fld id="{5BCAD085-E8A6-8845-BD4E-CB4CCA059FC4}" type="datetimeFigureOut">
               <a:rPr lang="en-US" smtClean="0"/>
-              <a:t>1/27/13</a:t>
+              <a:t>10/28/26</a:t>
             </a:fld>
             <a:endParaRPr lang="en-US"/>
           </a:p>
@@ -514,7 +524,7 @@
           <a:p>
             <a:fld id="{C1FF6DA9-008F-8B48-92A6-B652298478BF}" type="slidenum">
               <a:rPr lang="en-US" smtClean="0"/>
-              <a:t>‹#›</a:t>
+              <a:t>‹Nº›</a:t>
             </a:fld>
             <a:endParaRPr lang="en-US"/>
           </a:p>
@@ -571,10 +581,9 @@
           <a:lstStyle/>
           <a:p>
             <a:r>
-              <a:rPr lang="en-US" smtClean="0"/>
+              <a:rPr lang="en-US"/>
               <a:t>Click to edit Master title style</a:t>
             </a:r>
-            <a:endParaRPr lang="en-US"/>
           </a:p>
         </p:txBody>
       </p:sp>
@@ -600,38 +609,37 @@
           <a:p>
             <a:pPr lvl="0"/>
             <a:r>
-              <a:rPr lang="en-US" smtClean="0"/>
+              <a:rPr lang="en-US"/>
               <a:t>Click to edit Master text styles</a:t>
             </a:r>
           </a:p>
           <a:p>
             <a:pPr lvl="1"/>
             <a:r>
-              <a:rPr lang="en-US" smtClean="0"/>
+              <a:rPr lang="en-US"/>
               <a:t>Second level</a:t>
             </a:r>
           </a:p>
           <a:p>
             <a:pPr lvl="2"/>
             <a:r>
-              <a:rPr lang="en-US" smtClean="0"/>
+              <a:rPr lang="en-US"/>
               <a:t>Third level</a:t>
             </a:r>
           </a:p>
           <a:p>
             <a:pPr lvl="3"/>
             <a:r>
-              <a:rPr lang="en-US" smtClean="0"/>
+              <a:rPr lang="en-US"/>
               <a:t>Fourth level</a:t>
             </a:r>
           </a:p>
           <a:p>
             <a:pPr lvl="4"/>
             <a:r>
-              <a:rPr lang="en-US" smtClean="0"/>
+              <a:rPr lang="en-US"/>
               <a:t>Fifth level</a:t>
             </a:r>
-            <a:endParaRPr lang="en-US"/>
           </a:p>
         </p:txBody>
       </p:sp>
@@ -652,7 +660,7 @@
           <a:p>
             <a:fld id="{5BCAD085-E8A6-8845-BD4E-CB4CCA059FC4}" type="datetimeFigureOut">
               <a:rPr lang="en-US" smtClean="0"/>
-              <a:t>1/27/13</a:t>
+              <a:t>10/28/26</a:t>
             </a:fld>
             <a:endParaRPr lang="en-US"/>
           </a:p>
@@ -694,7 +702,7 @@
           <a:p>
             <a:fld id="{C1FF6DA9-008F-8B48-92A6-B652298478BF}" type="slidenum">
               <a:rPr lang="en-US" smtClean="0"/>
-              <a:t>‹#›</a:t>
+              <a:t>‹Nº›</a:t>
             </a:fld>
             <a:endParaRPr lang="en-US"/>
           </a:p>
@@ -746,10 +754,9 @@
           <a:lstStyle/>
           <a:p>
             <a:r>
-              <a:rPr lang="en-US" smtClean="0"/>
+              <a:rPr lang="en-US"/>
               <a:t>Click to edit Master title style</a:t>
             </a:r>
-            <a:endParaRPr lang="en-US"/>
           </a:p>
         </p:txBody>
       </p:sp>
@@ -770,38 +777,37 @@
           <a:p>
             <a:pPr lvl="0"/>
             <a:r>
-              <a:rPr lang="en-US" smtClean="0"/>
+              <a:rPr lang="en-US"/>
               <a:t>Click to edit Master text styles</a:t>
             </a:r>
           </a:p>
           <a:p>
             <a:pPr lvl="1"/>
             <a:r>
-              <a:rPr lang="en-US" smtClean="0"/>
+              <a:rPr lang="en-US"/>
               <a:t>Second level</a:t>
             </a:r>
           </a:p>
           <a:p>
             <a:pPr lvl="2"/>
             <a:r>
-              <a:rPr lang="en-US" smtClean="0"/>
+              <a:rPr lang="en-US"/>
               <a:t>Third level</a:t>
             </a:r>
           </a:p>
           <a:p>
             <a:pPr lvl="3"/>
             <a:r>
-              <a:rPr lang="en-US" smtClean="0"/>
+              <a:rPr lang="en-US"/>
               <a:t>Fourth level</a:t>
             </a:r>
           </a:p>
           <a:p>
             <a:pPr lvl="4"/>
             <a:r>
-              <a:rPr lang="en-US" smtClean="0"/>
+              <a:rPr lang="en-US"/>
               <a:t>Fifth level</a:t>
             </a:r>
-            <a:endParaRPr lang="en-US"/>
           </a:p>
         </p:txBody>
       </p:sp>
@@ -822,7 +828,7 @@
           <a:p>
             <a:fld id="{5BCAD085-E8A6-8845-BD4E-CB4CCA059FC4}" type="datetimeFigureOut">
               <a:rPr lang="en-US" smtClean="0"/>
-              <a:t>1/27/13</a:t>
+              <a:t>10/28/26</a:t>
             </a:fld>
             <a:endParaRPr lang="en-US"/>
           </a:p>
@@ -864,7 +870,7 @@
           <a:p>
             <a:fld id="{C1FF6DA9-008F-8B48-92A6-B652298478BF}" type="slidenum">
               <a:rPr lang="en-US" smtClean="0"/>
-              <a:t>‹#›</a:t>
+              <a:t>‹Nº›</a:t>
             </a:fld>
             <a:endParaRPr lang="en-US"/>
           </a:p>
@@ -925,10 +931,9 @@
           </a:lstStyle>
           <a:p>
             <a:r>
-              <a:rPr lang="en-US" smtClean="0"/>
+              <a:rPr lang="en-US"/>
               <a:t>Click to edit Master title style</a:t>
             </a:r>
-            <a:endParaRPr lang="en-US"/>
           </a:p>
         </p:txBody>
       </p:sp>
@@ -1045,7 +1050,7 @@
           <a:p>
             <a:pPr lvl="0"/>
             <a:r>
-              <a:rPr lang="en-US" smtClean="0"/>
+              <a:rPr lang="en-US"/>
               <a:t>Click to edit Master text styles</a:t>
             </a:r>
           </a:p>
@@ -1068,7 +1073,7 @@
           <a:p>
             <a:fld id="{5BCAD085-E8A6-8845-BD4E-CB4CCA059FC4}" type="datetimeFigureOut">
               <a:rPr lang="en-US" smtClean="0"/>
-              <a:t>1/27/13</a:t>
+              <a:t>10/28/26</a:t>
             </a:fld>
             <a:endParaRPr lang="en-US"/>
           </a:p>
@@ -1110,7 +1115,7 @@
           <a:p>
             <a:fld id="{C1FF6DA9-008F-8B48-92A6-B652298478BF}" type="slidenum">
               <a:rPr lang="en-US" smtClean="0"/>
-              <a:t>‹#›</a:t>
+              <a:t>‹Nº›</a:t>
             </a:fld>
             <a:endParaRPr lang="en-US"/>
           </a:p>
@@ -1162,10 +1167,9 @@
           <a:lstStyle/>
           <a:p>
             <a:r>
-              <a:rPr lang="en-US" smtClean="0"/>
+              <a:rPr lang="en-US"/>
               <a:t>Click to edit Master title style</a:t>
             </a:r>
-            <a:endParaRPr lang="en-US"/>
           </a:p>
         </p:txBody>
       </p:sp>
@@ -1219,38 +1223,37 @@
           <a:p>
             <a:pPr lvl="0"/>
             <a:r>
-              <a:rPr lang="en-US" smtClean="0"/>
+              <a:rPr lang="en-US"/>
               <a:t>Click to edit Master text styles</a:t>
             </a:r>
           </a:p>
           <a:p>
             <a:pPr lvl="1"/>
             <a:r>
-              <a:rPr lang="en-US" smtClean="0"/>
+              <a:rPr lang="en-US"/>
               <a:t>Second level</a:t>
             </a:r>
           </a:p>
           <a:p>
             <a:pPr lvl="2"/>
             <a:r>
-              <a:rPr lang="en-US" smtClean="0"/>
+              <a:rPr lang="en-US"/>
               <a:t>Third level</a:t>
             </a:r>
           </a:p>
           <a:p>
             <a:pPr lvl="3"/>
             <a:r>
-              <a:rPr lang="en-US" smtClean="0"/>
+              <a:rPr lang="en-US"/>
               <a:t>Fourth level</a:t>
             </a:r>
           </a:p>
           <a:p>
             <a:pPr lvl="4"/>
             <a:r>
-              <a:rPr lang="en-US" smtClean="0"/>
+              <a:rPr lang="en-US"/>
               <a:t>Fifth level</a:t>
             </a:r>
-            <a:endParaRPr lang="en-US"/>
           </a:p>
         </p:txBody>
       </p:sp>
@@ -1304,38 +1307,37 @@
           <a:p>
             <a:pPr lvl="0"/>
             <a:r>
-              <a:rPr lang="en-US" smtClean="0"/>
+              <a:rPr lang="en-US"/>
               <a:t>Click to edit Master text styles</a:t>
             </a:r>
           </a:p>
           <a:p>
             <a:pPr lvl="1"/>
             <a:r>
-              <a:rPr lang="en-US" smtClean="0"/>
+              <a:rPr lang="en-US"/>
               <a:t>Second level</a:t>
             </a:r>
           </a:p>
           <a:p>
             <a:pPr lvl="2"/>
             <a:r>
-              <a:rPr lang="en-US" smtClean="0"/>
+              <a:rPr lang="en-US"/>
               <a:t>Third level</a:t>
             </a:r>
           </a:p>
           <a:p>
             <a:pPr lvl="3"/>
             <a:r>
-              <a:rPr lang="en-US" smtClean="0"/>
+              <a:rPr lang="en-US"/>
               <a:t>Fourth level</a:t>
             </a:r>
           </a:p>
           <a:p>
             <a:pPr lvl="4"/>
             <a:r>
-              <a:rPr lang="en-US" smtClean="0"/>
+              <a:rPr lang="en-US"/>
               <a:t>Fifth level</a:t>
             </a:r>
-            <a:endParaRPr lang="en-US"/>
           </a:p>
         </p:txBody>
       </p:sp>
@@ -1356,7 +1358,7 @@
           <a:p>
             <a:fld id="{5BCAD085-E8A6-8845-BD4E-CB4CCA059FC4}" type="datetimeFigureOut">
               <a:rPr lang="en-US" smtClean="0"/>
-              <a:t>1/27/13</a:t>
+              <a:t>10/28/26</a:t>
             </a:fld>
             <a:endParaRPr lang="en-US"/>
           </a:p>
@@ -1398,7 +1400,7 @@
           <a:p>
             <a:fld id="{C1FF6DA9-008F-8B48-92A6-B652298478BF}" type="slidenum">
               <a:rPr lang="en-US" smtClean="0"/>
-              <a:t>‹#›</a:t>
+              <a:t>‹Nº›</a:t>
             </a:fld>
             <a:endParaRPr lang="en-US"/>
           </a:p>
@@ -1454,10 +1456,9 @@
           </a:lstStyle>
           <a:p>
             <a:r>
-              <a:rPr lang="en-US" smtClean="0"/>
+              <a:rPr lang="en-US"/>
               <a:t>Click to edit Master title style</a:t>
             </a:r>
-            <a:endParaRPr lang="en-US"/>
           </a:p>
         </p:txBody>
       </p:sp>
@@ -1520,7 +1521,7 @@
           <a:p>
             <a:pPr lvl="0"/>
             <a:r>
-              <a:rPr lang="en-US" smtClean="0"/>
+              <a:rPr lang="en-US"/>
               <a:t>Click to edit Master text styles</a:t>
             </a:r>
           </a:p>
@@ -1576,38 +1577,37 @@
           <a:p>
             <a:pPr lvl="0"/>
             <a:r>
-              <a:rPr lang="en-US" smtClean="0"/>
+              <a:rPr lang="en-US"/>
               <a:t>Click to edit Master text styles</a:t>
             </a:r>
           </a:p>
           <a:p>
             <a:pPr lvl="1"/>
             <a:r>
-              <a:rPr lang="en-US" smtClean="0"/>
+              <a:rPr lang="en-US"/>
               <a:t>Second level</a:t>
             </a:r>
           </a:p>
           <a:p>
             <a:pPr lvl="2"/>
             <a:r>
-              <a:rPr lang="en-US" smtClean="0"/>
+              <a:rPr lang="en-US"/>
               <a:t>Third level</a:t>
             </a:r>
           </a:p>
           <a:p>
             <a:pPr lvl="3"/>
             <a:r>
-              <a:rPr lang="en-US" smtClean="0"/>
+              <a:rPr lang="en-US"/>
               <a:t>Fourth level</a:t>
             </a:r>
           </a:p>
           <a:p>
             <a:pPr lvl="4"/>
             <a:r>
-              <a:rPr lang="en-US" smtClean="0"/>
+              <a:rPr lang="en-US"/>
               <a:t>Fifth level</a:t>
             </a:r>
-            <a:endParaRPr lang="en-US"/>
           </a:p>
         </p:txBody>
       </p:sp>
@@ -1670,7 +1670,7 @@
           <a:p>
             <a:pPr lvl="0"/>
             <a:r>
-              <a:rPr lang="en-US" smtClean="0"/>
+              <a:rPr lang="en-US"/>
               <a:t>Click to edit Master text styles</a:t>
             </a:r>
           </a:p>
@@ -1726,38 +1726,37 @@
           <a:p>
             <a:pPr lvl="0"/>
             <a:r>
-              <a:rPr lang="en-US" smtClean="0"/>
+              <a:rPr lang="en-US"/>
               <a:t>Click to edit Master text styles</a:t>
             </a:r>
           </a:p>
           <a:p>
             <a:pPr lvl="1"/>
             <a:r>
-              <a:rPr lang="en-US" smtClean="0"/>
+              <a:rPr lang="en-US"/>
               <a:t>Second level</a:t>
             </a:r>
           </a:p>
           <a:p>
             <a:pPr lvl="2"/>
             <a:r>
-              <a:rPr lang="en-US" smtClean="0"/>
+              <a:rPr lang="en-US"/>
               <a:t>Third level</a:t>
             </a:r>
           </a:p>
           <a:p>
             <a:pPr lvl="3"/>
             <a:r>
-              <a:rPr lang="en-US" smtClean="0"/>
+              <a:rPr lang="en-US"/>
               <a:t>Fourth level</a:t>
             </a:r>
           </a:p>
           <a:p>
             <a:pPr lvl="4"/>
             <a:r>
-              <a:rPr lang="en-US" smtClean="0"/>
+              <a:rPr lang="en-US"/>
               <a:t>Fifth level</a:t>
             </a:r>
-            <a:endParaRPr lang="en-US"/>
           </a:p>
         </p:txBody>
       </p:sp>
@@ -1778,7 +1777,7 @@
           <a:p>
             <a:fld id="{5BCAD085-E8A6-8845-BD4E-CB4CCA059FC4}" type="datetimeFigureOut">
               <a:rPr lang="en-US" smtClean="0"/>
-              <a:t>1/27/13</a:t>
+              <a:t>10/28/26</a:t>
             </a:fld>
             <a:endParaRPr lang="en-US"/>
           </a:p>
@@ -1820,7 +1819,7 @@
           <a:p>
             <a:fld id="{C1FF6DA9-008F-8B48-92A6-B652298478BF}" type="slidenum">
               <a:rPr lang="en-US" smtClean="0"/>
-              <a:t>‹#›</a:t>
+              <a:t>‹Nº›</a:t>
             </a:fld>
             <a:endParaRPr lang="en-US"/>
           </a:p>
@@ -1872,10 +1871,9 @@
           <a:lstStyle/>
           <a:p>
             <a:r>
-              <a:rPr lang="en-US" smtClean="0"/>
+              <a:rPr lang="en-US"/>
               <a:t>Click to edit Master title style</a:t>
             </a:r>
-            <a:endParaRPr lang="en-US"/>
           </a:p>
         </p:txBody>
       </p:sp>
@@ -1896,7 +1894,7 @@
           <a:p>
             <a:fld id="{5BCAD085-E8A6-8845-BD4E-CB4CCA059FC4}" type="datetimeFigureOut">
               <a:rPr lang="en-US" smtClean="0"/>
-              <a:t>1/27/13</a:t>
+              <a:t>10/28/26</a:t>
             </a:fld>
             <a:endParaRPr lang="en-US"/>
           </a:p>
@@ -1938,7 +1936,7 @@
           <a:p>
             <a:fld id="{C1FF6DA9-008F-8B48-92A6-B652298478BF}" type="slidenum">
               <a:rPr lang="en-US" smtClean="0"/>
-              <a:t>‹#›</a:t>
+              <a:t>‹Nº›</a:t>
             </a:fld>
             <a:endParaRPr lang="en-US"/>
           </a:p>
@@ -1991,7 +1989,7 @@
           <a:p>
             <a:fld id="{5BCAD085-E8A6-8845-BD4E-CB4CCA059FC4}" type="datetimeFigureOut">
               <a:rPr lang="en-US" smtClean="0"/>
-              <a:t>1/27/13</a:t>
+              <a:t>10/28/26</a:t>
             </a:fld>
             <a:endParaRPr lang="en-US"/>
           </a:p>
@@ -2033,7 +2031,7 @@
           <a:p>
             <a:fld id="{C1FF6DA9-008F-8B48-92A6-B652298478BF}" type="slidenum">
               <a:rPr lang="en-US" smtClean="0"/>
-              <a:t>‹#›</a:t>
+              <a:t>‹Nº›</a:t>
             </a:fld>
             <a:endParaRPr lang="en-US"/>
           </a:p>
@@ -2094,10 +2092,9 @@
           </a:lstStyle>
           <a:p>
             <a:r>
-              <a:rPr lang="en-US" smtClean="0"/>
+              <a:rPr lang="en-US"/>
               <a:t>Click to edit Master title style</a:t>
             </a:r>
-            <a:endParaRPr lang="en-US"/>
           </a:p>
         </p:txBody>
       </p:sp>
@@ -2151,38 +2148,37 @@
           <a:p>
             <a:pPr lvl="0"/>
             <a:r>
-              <a:rPr lang="en-US" smtClean="0"/>
+              <a:rPr lang="en-US"/>
               <a:t>Click to edit Master text styles</a:t>
             </a:r>
           </a:p>
           <a:p>
             <a:pPr lvl="1"/>
             <a:r>
-              <a:rPr lang="en-US" smtClean="0"/>
+              <a:rPr lang="en-US"/>
               <a:t>Second level</a:t>
             </a:r>
           </a:p>
           <a:p>
             <a:pPr lvl="2"/>
             <a:r>
-              <a:rPr lang="en-US" smtClean="0"/>
+              <a:rPr lang="en-US"/>
               <a:t>Third level</a:t>
             </a:r>
           </a:p>
           <a:p>
             <a:pPr lvl="3"/>
             <a:r>
-              <a:rPr lang="en-US" smtClean="0"/>
+              <a:rPr lang="en-US"/>
               <a:t>Fourth level</a:t>
             </a:r>
           </a:p>
           <a:p>
             <a:pPr lvl="4"/>
             <a:r>
-              <a:rPr lang="en-US" smtClean="0"/>
+              <a:rPr lang="en-US"/>
               <a:t>Fifth level</a:t>
             </a:r>
-            <a:endParaRPr lang="en-US"/>
           </a:p>
         </p:txBody>
       </p:sp>
@@ -2245,7 +2241,7 @@
           <a:p>
             <a:pPr lvl="0"/>
             <a:r>
-              <a:rPr lang="en-US" smtClean="0"/>
+              <a:rPr lang="en-US"/>
               <a:t>Click to edit Master text styles</a:t>
             </a:r>
           </a:p>
@@ -2268,7 +2264,7 @@
           <a:p>
             <a:fld id="{5BCAD085-E8A6-8845-BD4E-CB4CCA059FC4}" type="datetimeFigureOut">
               <a:rPr lang="en-US" smtClean="0"/>
-              <a:t>1/27/13</a:t>
+              <a:t>10/28/26</a:t>
             </a:fld>
             <a:endParaRPr lang="en-US"/>
           </a:p>
@@ -2310,7 +2306,7 @@
           <a:p>
             <a:fld id="{C1FF6DA9-008F-8B48-92A6-B652298478BF}" type="slidenum">
               <a:rPr lang="en-US" smtClean="0"/>
-              <a:t>‹#›</a:t>
+              <a:t>‹Nº›</a:t>
             </a:fld>
             <a:endParaRPr lang="en-US"/>
           </a:p>
@@ -2371,10 +2367,9 @@
           </a:lstStyle>
           <a:p>
             <a:r>
-              <a:rPr lang="en-US" smtClean="0"/>
+              <a:rPr lang="en-US"/>
               <a:t>Click to edit Master title style</a:t>
             </a:r>
-            <a:endParaRPr lang="en-US"/>
           </a:p>
         </p:txBody>
       </p:sp>
@@ -2498,7 +2493,7 @@
           <a:p>
             <a:pPr lvl="0"/>
             <a:r>
-              <a:rPr lang="en-US" smtClean="0"/>
+              <a:rPr lang="en-US"/>
               <a:t>Click to edit Master text styles</a:t>
             </a:r>
           </a:p>
@@ -2521,7 +2516,7 @@
           <a:p>
             <a:fld id="{5BCAD085-E8A6-8845-BD4E-CB4CCA059FC4}" type="datetimeFigureOut">
               <a:rPr lang="en-US" smtClean="0"/>
-              <a:t>1/27/13</a:t>
+              <a:t>10/28/26</a:t>
             </a:fld>
             <a:endParaRPr lang="en-US"/>
           </a:p>
@@ -2563,7 +2558,7 @@
           <a:p>
             <a:fld id="{C1FF6DA9-008F-8B48-92A6-B652298478BF}" type="slidenum">
               <a:rPr lang="en-US" smtClean="0"/>
-              <a:t>‹#›</a:t>
+              <a:t>‹Nº›</a:t>
             </a:fld>
             <a:endParaRPr lang="en-US"/>
           </a:p>
@@ -2630,10 +2625,9 @@
           <a:lstStyle/>
           <a:p>
             <a:r>
-              <a:rPr lang="en-US" smtClean="0"/>
+              <a:rPr lang="en-US"/>
               <a:t>Click to edit Master title style</a:t>
             </a:r>
-            <a:endParaRPr lang="en-US"/>
           </a:p>
         </p:txBody>
       </p:sp>
@@ -2664,38 +2658,37 @@
           <a:p>
             <a:pPr lvl="0"/>
             <a:r>
-              <a:rPr lang="en-US" smtClean="0"/>
+              <a:rPr lang="en-US"/>
               <a:t>Click to edit Master text styles</a:t>
             </a:r>
           </a:p>
           <a:p>
             <a:pPr lvl="1"/>
             <a:r>
-              <a:rPr lang="en-US" smtClean="0"/>
+              <a:rPr lang="en-US"/>
               <a:t>Second level</a:t>
             </a:r>
           </a:p>
           <a:p>
             <a:pPr lvl="2"/>
             <a:r>
-              <a:rPr lang="en-US" smtClean="0"/>
+              <a:rPr lang="en-US"/>
               <a:t>Third level</a:t>
             </a:r>
           </a:p>
           <a:p>
             <a:pPr lvl="3"/>
             <a:r>
-              <a:rPr lang="en-US" smtClean="0"/>
+              <a:rPr lang="en-US"/>
               <a:t>Fourth level</a:t>
             </a:r>
           </a:p>
           <a:p>
             <a:pPr lvl="4"/>
             <a:r>
-              <a:rPr lang="en-US" smtClean="0"/>
+              <a:rPr lang="en-US"/>
               <a:t>Fifth level</a:t>
             </a:r>
-            <a:endParaRPr lang="en-US"/>
           </a:p>
         </p:txBody>
       </p:sp>
@@ -2734,7 +2727,7 @@
           <a:p>
             <a:fld id="{5BCAD085-E8A6-8845-BD4E-CB4CCA059FC4}" type="datetimeFigureOut">
               <a:rPr lang="en-US" smtClean="0"/>
-              <a:t>1/27/13</a:t>
+              <a:t>10/28/26</a:t>
             </a:fld>
             <a:endParaRPr lang="en-US"/>
           </a:p>
@@ -2812,7 +2805,7 @@
           <a:p>
             <a:fld id="{C1FF6DA9-008F-8B48-92A6-B652298478BF}" type="slidenum">
               <a:rPr lang="en-US" smtClean="0"/>
-              <a:t>‹#›</a:t>
+              <a:t>‹Nº›</a:t>
             </a:fld>
             <a:endParaRPr lang="en-US"/>
           </a:p>
@@ -3093,7 +3086,7 @@
 </file>
 
 <file path=ppt/slides/slide1.xml><?xml version="1.0" encoding="utf-8"?>
-<p:sld xmlns:a="http://schemas.openxmlformats.org/drawingml/2006/main" xmlns:p="http://schemas.openxmlformats.org/presentationml/2006/main" xmlns:r="http://schemas.openxmlformats.org/officeDocument/2006/relationships">
+<p:sld xmlns:a="http://schemas.openxmlformats.org/drawingml/2006/main" xmlns:r="http://schemas.openxmlformats.org/officeDocument/2006/relationships" xmlns:p="http://schemas.openxmlformats.org/presentationml/2006/main">
   <p:cSld>
     <p:spTree>
       <p:nvGrpSpPr>
@@ -3101,7 +3094,14 @@
         <p:cNvGrpSpPr/>
         <p:nvPr/>
       </p:nvGrpSpPr>
-      <p:grpSpPr/>
+      <p:grpSpPr>
+        <a:xfrm>
+          <a:off x="0" y="0"/>
+          <a:ext cx="0" cy="0"/>
+          <a:chOff x="0" y="0"/>
+          <a:chExt cx="0" cy="0"/>
+        </a:xfrm>
+      </p:grpSpPr>
       <p:sp>
         <p:nvSpPr>
           <p:cNvPr id="2" name="Rectangle 1"/>
@@ -3142,6 +3142,7 @@
           <a:lstStyle/>
           <a:p>
             <a:pPr algn="ctr"/>
+            <a:endParaRPr/>
           </a:p>
         </p:txBody>
       </p:sp>
@@ -3185,6 +3186,7 @@
           <a:lstStyle/>
           <a:p>
             <a:pPr algn="ctr"/>
+            <a:endParaRPr/>
           </a:p>
         </p:txBody>
       </p:sp>
@@ -3338,7 +3340,7 @@
 </file>
 
 <file path=ppt/slides/slide10.xml><?xml version="1.0" encoding="utf-8"?>
-<p:sld xmlns:a="http://schemas.openxmlformats.org/drawingml/2006/main" xmlns:p="http://schemas.openxmlformats.org/presentationml/2006/main" xmlns:r="http://schemas.openxmlformats.org/officeDocument/2006/relationships">
+<p:sld xmlns:a="http://schemas.openxmlformats.org/drawingml/2006/main" xmlns:r="http://schemas.openxmlformats.org/officeDocument/2006/relationships" xmlns:p="http://schemas.openxmlformats.org/presentationml/2006/main">
   <p:cSld>
     <p:spTree>
       <p:nvGrpSpPr>
@@ -3346,7 +3348,14 @@
         <p:cNvGrpSpPr/>
         <p:nvPr/>
       </p:nvGrpSpPr>
-      <p:grpSpPr/>
+      <p:grpSpPr>
+        <a:xfrm>
+          <a:off x="0" y="0"/>
+          <a:ext cx="0" cy="0"/>
+          <a:chOff x="0" y="0"/>
+          <a:chExt cx="0" cy="0"/>
+        </a:xfrm>
+      </p:grpSpPr>
       <p:sp>
         <p:nvSpPr>
           <p:cNvPr id="2" name="Rectangle 1"/>
@@ -3387,6 +3396,7 @@
           <a:lstStyle/>
           <a:p>
             <a:pPr algn="ctr"/>
+            <a:endParaRPr/>
           </a:p>
         </p:txBody>
       </p:sp>
@@ -3430,6 +3440,7 @@
           <a:lstStyle/>
           <a:p>
             <a:pPr algn="ctr"/>
+            <a:endParaRPr/>
           </a:p>
         </p:txBody>
       </p:sp>
@@ -3473,6 +3484,7 @@
           <a:lstStyle/>
           <a:p>
             <a:pPr algn="ctr"/>
+            <a:endParaRPr/>
           </a:p>
         </p:txBody>
       </p:sp>
@@ -3519,8 +3531,8 @@
         </p:nvSpPr>
         <p:spPr>
           <a:xfrm>
-            <a:off x="10378440" y="6528816"/>
-            <a:ext cx="1371600" cy="292608"/>
+            <a:off x="10378440" y="6544315"/>
+            <a:ext cx="1371600" cy="261610"/>
           </a:xfrm>
           <a:prstGeom prst="rect">
             <a:avLst/>
@@ -3535,14 +3547,29 @@
           <a:p>
             <a:pPr algn="r"/>
             <a:r>
-              <a:rPr sz="1100" b="0">
+              <a:rPr sz="1100" b="0" dirty="0">
                 <a:solidFill>
                   <a:srgbClr val="FFFFFF"/>
                 </a:solidFill>
                 <a:latin typeface="Calibri"/>
               </a:rPr>
-              <a:t>10 / 15</a:t>
-            </a:r>
+              <a:t>10 / 1</a:t>
+            </a:r>
+            <a:r>
+              <a:rPr lang="es-419" sz="1100" b="0" dirty="0">
+                <a:solidFill>
+                  <a:srgbClr val="FFFFFF"/>
+                </a:solidFill>
+                <a:latin typeface="Calibri"/>
+              </a:rPr>
+              <a:t>3</a:t>
+            </a:r>
+            <a:endParaRPr sz="1100" b="0" dirty="0">
+              <a:solidFill>
+                <a:srgbClr val="FFFFFF"/>
+              </a:solidFill>
+              <a:latin typeface="Calibri"/>
+            </a:endParaRPr>
           </a:p>
         </p:txBody>
       </p:sp>
@@ -3621,6 +3648,7 @@
           <a:lstStyle/>
           <a:p>
             <a:pPr algn="ctr"/>
+            <a:endParaRPr/>
           </a:p>
         </p:txBody>
       </p:sp>
@@ -3703,6 +3731,7 @@
           <a:lstStyle/>
           <a:p>
             <a:pPr algn="ctr"/>
+            <a:endParaRPr/>
           </a:p>
         </p:txBody>
       </p:sp>
@@ -3855,6 +3884,7 @@
           <a:lstStyle/>
           <a:p>
             <a:pPr algn="ctr"/>
+            <a:endParaRPr/>
           </a:p>
         </p:txBody>
       </p:sp>
@@ -4007,6 +4037,7 @@
           <a:lstStyle/>
           <a:p>
             <a:pPr algn="ctr"/>
+            <a:endParaRPr/>
           </a:p>
         </p:txBody>
       </p:sp>
@@ -4159,6 +4190,7 @@
           <a:lstStyle/>
           <a:p>
             <a:pPr algn="ctr"/>
+            <a:endParaRPr/>
           </a:p>
         </p:txBody>
       </p:sp>
@@ -4276,7 +4308,7 @@
 </file>
 
 <file path=ppt/slides/slide11.xml><?xml version="1.0" encoding="utf-8"?>
-<p:sld xmlns:a="http://schemas.openxmlformats.org/drawingml/2006/main" xmlns:p="http://schemas.openxmlformats.org/presentationml/2006/main" xmlns:r="http://schemas.openxmlformats.org/officeDocument/2006/relationships">
+<p:sld xmlns:a="http://schemas.openxmlformats.org/drawingml/2006/main" xmlns:r="http://schemas.openxmlformats.org/officeDocument/2006/relationships" xmlns:p="http://schemas.openxmlformats.org/presentationml/2006/main">
   <p:cSld>
     <p:spTree>
       <p:nvGrpSpPr>
@@ -4284,7 +4316,14 @@
         <p:cNvGrpSpPr/>
         <p:nvPr/>
       </p:nvGrpSpPr>
-      <p:grpSpPr/>
+      <p:grpSpPr>
+        <a:xfrm>
+          <a:off x="0" y="0"/>
+          <a:ext cx="0" cy="0"/>
+          <a:chOff x="0" y="0"/>
+          <a:chExt cx="0" cy="0"/>
+        </a:xfrm>
+      </p:grpSpPr>
       <p:sp>
         <p:nvSpPr>
           <p:cNvPr id="2" name="Rectangle 1"/>
@@ -4325,6 +4364,7 @@
           <a:lstStyle/>
           <a:p>
             <a:pPr algn="ctr"/>
+            <a:endParaRPr/>
           </a:p>
         </p:txBody>
       </p:sp>
@@ -4368,6 +4408,7 @@
           <a:lstStyle/>
           <a:p>
             <a:pPr algn="ctr"/>
+            <a:endParaRPr/>
           </a:p>
         </p:txBody>
       </p:sp>
@@ -4411,6 +4452,7 @@
           <a:lstStyle/>
           <a:p>
             <a:pPr algn="ctr"/>
+            <a:endParaRPr/>
           </a:p>
         </p:txBody>
       </p:sp>
@@ -4457,8 +4499,8 @@
         </p:nvSpPr>
         <p:spPr>
           <a:xfrm>
-            <a:off x="10378440" y="6528816"/>
-            <a:ext cx="1371600" cy="292608"/>
+            <a:off x="10378440" y="6544315"/>
+            <a:ext cx="1371600" cy="261610"/>
           </a:xfrm>
           <a:prstGeom prst="rect">
             <a:avLst/>
@@ -4473,133 +4515,53 @@
           <a:p>
             <a:pPr algn="r"/>
             <a:r>
-              <a:rPr sz="1100" b="0">
+              <a:rPr sz="1100" b="0" dirty="0">
                 <a:solidFill>
                   <a:srgbClr val="FFFFFF"/>
                 </a:solidFill>
                 <a:latin typeface="Calibri"/>
               </a:rPr>
-              <a:t>11 / 15</a:t>
-            </a:r>
-          </a:p>
-        </p:txBody>
-      </p:sp>
-      <p:sp>
-        <p:nvSpPr>
-          <p:cNvPr id="7" name="TextBox 6"/>
-          <p:cNvSpPr txBox="1"/>
-          <p:nvPr/>
-        </p:nvSpPr>
-        <p:spPr>
-          <a:xfrm>
-            <a:off x="502920" y="256032"/>
-            <a:ext cx="11155680" cy="502920"/>
-          </a:xfrm>
-          <a:prstGeom prst="rect">
-            <a:avLst/>
-          </a:prstGeom>
-          <a:noFill/>
-        </p:spPr>
-        <p:txBody>
-          <a:bodyPr wrap="square" anchor="ctr">
-            <a:spAutoFit/>
-          </a:bodyPr>
-          <a:lstStyle/>
-          <a:p>
-            <a:pPr algn="l"/>
-            <a:r>
-              <a:rPr sz="2800" b="1">
-                <a:solidFill>
-                  <a:srgbClr val="0F2C59"/>
-                </a:solidFill>
-                <a:latin typeface="Calibri"/>
-              </a:rPr>
-              <a:t>Inferencia</a:t>
-            </a:r>
-          </a:p>
-        </p:txBody>
-      </p:sp>
-      <p:sp>
-        <p:nvSpPr>
-          <p:cNvPr id="8" name="Rectangle 7"/>
-          <p:cNvSpPr/>
-          <p:nvPr/>
-        </p:nvSpPr>
-        <p:spPr>
-          <a:xfrm>
-            <a:off x="502920" y="804672"/>
-            <a:ext cx="1280160" cy="54864"/>
-          </a:xfrm>
-          <a:prstGeom prst="rect">
-            <a:avLst/>
-          </a:prstGeom>
-          <a:solidFill>
-            <a:srgbClr val="E8B93A"/>
-          </a:solidFill>
-          <a:ln>
-            <a:noFill/>
-          </a:ln>
-        </p:spPr>
-        <p:style>
-          <a:lnRef idx="1">
-            <a:schemeClr val="accent1"/>
-          </a:lnRef>
-          <a:fillRef idx="3">
-            <a:schemeClr val="accent1"/>
-          </a:fillRef>
-          <a:effectRef idx="2">
-            <a:schemeClr val="accent1"/>
-          </a:effectRef>
-          <a:fontRef idx="minor">
-            <a:schemeClr val="lt1"/>
-          </a:fontRef>
-        </p:style>
-        <p:txBody>
-          <a:bodyPr rtlCol="0" anchor="ctr"/>
-          <a:lstStyle/>
-          <a:p>
-            <a:pPr algn="ctr"/>
-          </a:p>
-        </p:txBody>
-      </p:sp>
-      <p:sp>
-        <p:nvSpPr>
-          <p:cNvPr id="9" name="TextBox 8"/>
-          <p:cNvSpPr txBox="1"/>
-          <p:nvPr/>
-        </p:nvSpPr>
-        <p:spPr>
-          <a:xfrm>
-            <a:off x="502920" y="932688"/>
-            <a:ext cx="11155680" cy="365760"/>
-          </a:xfrm>
-          <a:prstGeom prst="rect">
-            <a:avLst/>
-          </a:prstGeom>
-          <a:noFill/>
-        </p:spPr>
-        <p:txBody>
-          <a:bodyPr wrap="square" anchor="ctr">
-            <a:spAutoFit/>
-          </a:bodyPr>
-          <a:lstStyle/>
-          <a:p>
-            <a:pPr algn="l"/>
-            <a:r>
-              <a:rPr sz="1600" b="0">
-                <a:solidFill>
-                  <a:srgbClr val="5D6D7E"/>
-                </a:solidFill>
-                <a:latin typeface="Calibri"/>
-              </a:rPr>
-              <a:t>De la definición de la conjunta a un algoritmo</a:t>
-            </a:r>
-          </a:p>
-        </p:txBody>
-      </p:sp>
-      <p:sp>
-        <p:nvSpPr>
-          <p:cNvPr id="10" name="Rounded Rectangle 9"/>
+              <a:t>1</a:t>
+            </a:r>
+            <a:r>
+              <a:rPr lang="es-419" sz="1100" b="0" dirty="0">
+                <a:solidFill>
+                  <a:srgbClr val="FFFFFF"/>
+                </a:solidFill>
+                <a:latin typeface="Calibri"/>
+              </a:rPr>
+              <a:t>1</a:t>
+            </a:r>
+            <a:r>
+              <a:rPr sz="1100" b="0" dirty="0">
+                <a:solidFill>
+                  <a:srgbClr val="FFFFFF"/>
+                </a:solidFill>
+                <a:latin typeface="Calibri"/>
+              </a:rPr>
+              <a:t> / 1</a:t>
+            </a:r>
+            <a:r>
+              <a:rPr lang="es-419" sz="1100" b="0" dirty="0">
+                <a:solidFill>
+                  <a:srgbClr val="FFFFFF"/>
+                </a:solidFill>
+                <a:latin typeface="Calibri"/>
+              </a:rPr>
+              <a:t>3</a:t>
+            </a:r>
+            <a:endParaRPr sz="1100" b="0" dirty="0">
+              <a:solidFill>
+                <a:srgbClr val="FFFFFF"/>
+              </a:solidFill>
+              <a:latin typeface="Calibri"/>
+            </a:endParaRPr>
+          </a:p>
+        </p:txBody>
+      </p:sp>
+      <p:sp>
+        <p:nvSpPr>
+          <p:cNvPr id="7" name="Rounded Rectangle 6"/>
           <p:cNvSpPr/>
           <p:nvPr/>
         </p:nvSpPr>
@@ -4641,12 +4603,13 @@
           <a:lstStyle/>
           <a:p>
             <a:pPr algn="ctr"/>
-          </a:p>
-        </p:txBody>
-      </p:sp>
-      <p:sp>
-        <p:nvSpPr>
-          <p:cNvPr id="11" name="TextBox 10"/>
+            <a:endParaRPr/>
+          </a:p>
+        </p:txBody>
+      </p:sp>
+      <p:sp>
+        <p:nvSpPr>
+          <p:cNvPr id="8" name="TextBox 7"/>
           <p:cNvSpPr txBox="1"/>
           <p:nvPr/>
         </p:nvSpPr>
@@ -4674,14 +4637,14 @@
                 </a:solidFill>
                 <a:latin typeface="Calibri"/>
               </a:rPr>
-              <a:t>Enumeración (lo que hicimos)</a:t>
-            </a:r>
-          </a:p>
-        </p:txBody>
-      </p:sp>
-      <p:sp>
-        <p:nvSpPr>
-          <p:cNvPr id="12" name="TextBox 11"/>
+              <a:t>Razonamiento lógico</a:t>
+            </a:r>
+          </a:p>
+        </p:txBody>
+      </p:sp>
+      <p:sp>
+        <p:nvSpPr>
+          <p:cNvPr id="9" name="TextBox 8"/>
           <p:cNvSpPr txBox="1"/>
           <p:nvPr/>
         </p:nvSpPr>
@@ -4713,7 +4676,7 @@
                 </a:solidFill>
                 <a:latin typeface="Calibri"/>
               </a:rPr>
-              <a:t>•  Escribir P(query, evidencia, ocultas) con las CPT.</a:t>
+              <a:t>•  Oraciones verdaderas o falsas.</a:t>
             </a:r>
           </a:p>
           <a:p>
@@ -4729,7 +4692,7 @@
                 </a:solidFill>
                 <a:latin typeface="Calibri"/>
               </a:rPr>
-              <a:t>•  Fijar la evidencia; sumar sobre las ocultas.</a:t>
+              <a:t>•  Entailment: se sigue o no se sigue.</a:t>
             </a:r>
           </a:p>
           <a:p>
@@ -4745,7 +4708,7 @@
                 </a:solidFill>
                 <a:latin typeface="Calibri"/>
               </a:rPr>
-              <a:t>•  Normalizar para que las hipótesis sumen 1.</a:t>
+              <a:t>•  FC / BC / resolución recorren reglas.</a:t>
             </a:r>
           </a:p>
           <a:p>
@@ -4761,14 +4724,14 @@
                 </a:solidFill>
                 <a:latin typeface="Calibri"/>
               </a:rPr>
-              <a:t>•  Exacto, pero O(2^ocultas): bien para 3 nodos, no para 30.</a:t>
-            </a:r>
-          </a:p>
-        </p:txBody>
-      </p:sp>
-      <p:sp>
-        <p:nvSpPr>
-          <p:cNvPr id="13" name="Rounded Rectangle 12"/>
+              <a:t>•  No hay «un poco más probable».</a:t>
+            </a:r>
+          </a:p>
+        </p:txBody>
+      </p:sp>
+      <p:sp>
+        <p:nvSpPr>
+          <p:cNvPr id="10" name="Rounded Rectangle 9"/>
           <p:cNvSpPr/>
           <p:nvPr/>
         </p:nvSpPr>
@@ -4810,12 +4773,13 @@
           <a:lstStyle/>
           <a:p>
             <a:pPr algn="ctr"/>
-          </a:p>
-        </p:txBody>
-      </p:sp>
-      <p:sp>
-        <p:nvSpPr>
-          <p:cNvPr id="14" name="TextBox 13"/>
+            <a:endParaRPr/>
+          </a:p>
+        </p:txBody>
+      </p:sp>
+      <p:sp>
+        <p:nvSpPr>
+          <p:cNvPr id="11" name="TextBox 10"/>
           <p:cNvSpPr txBox="1"/>
           <p:nvPr/>
         </p:nvSpPr>
@@ -4843,14 +4807,14 @@
                 </a:solidFill>
                 <a:latin typeface="Calibri"/>
               </a:rPr>
-              <a:t>Después en el curso</a:t>
-            </a:r>
-          </a:p>
-        </p:txBody>
-      </p:sp>
-      <p:sp>
-        <p:nvSpPr>
-          <p:cNvPr id="15" name="TextBox 14"/>
+              <a:t>Razonamiento probabilístico</a:t>
+            </a:r>
+          </a:p>
+        </p:txBody>
+      </p:sp>
+      <p:sp>
+        <p:nvSpPr>
+          <p:cNvPr id="12" name="TextBox 11"/>
           <p:cNvSpPr txBox="1"/>
           <p:nvPr/>
         </p:nvSpPr>
@@ -4882,7 +4846,7 @@
                 </a:solidFill>
                 <a:latin typeface="Calibri"/>
               </a:rPr>
-              <a:t>•  Eliminación de variables: factoriza las sumas.</a:t>
+              <a:t>•  Variables con P(· | evidencia).</a:t>
             </a:r>
           </a:p>
           <a:p>
@@ -4898,7 +4862,7 @@
                 </a:solidFill>
                 <a:latin typeface="Calibri"/>
               </a:rPr>
-              <a:t>•  Muestreo (likelihood weighting, MCMC) cuando la red es grande.</a:t>
+              <a:t>•  La misma evidencia mueve un número (0.20 → 0.65).</a:t>
             </a:r>
           </a:p>
           <a:p>
@@ -4914,7 +4878,7 @@
                 </a:solidFill>
                 <a:latin typeface="Calibri"/>
               </a:rPr>
-              <a:t>•  La estructura del grafo dice qué se puede omitir (d-separación).</a:t>
+              <a:t>•  El grafo dice qué independencias usar.</a:t>
             </a:r>
           </a:p>
           <a:p>
@@ -4930,7 +4894,7 @@
                 </a:solidFill>
                 <a:latin typeface="Calibri"/>
               </a:rPr>
-              <a:t>•  Hoy basta: CPT + producto + suma + normalizar.</a:t>
+              <a:t>•  Explaining away no existe en Horn.</a:t>
             </a:r>
           </a:p>
         </p:txBody>
@@ -4944,7 +4908,7 @@
 </file>
 
 <file path=ppt/slides/slide12.xml><?xml version="1.0" encoding="utf-8"?>
-<p:sld xmlns:a="http://schemas.openxmlformats.org/drawingml/2006/main" xmlns:p="http://schemas.openxmlformats.org/presentationml/2006/main" xmlns:r="http://schemas.openxmlformats.org/officeDocument/2006/relationships">
+<p:sld xmlns:a="http://schemas.openxmlformats.org/drawingml/2006/main" xmlns:r="http://schemas.openxmlformats.org/officeDocument/2006/relationships" xmlns:p="http://schemas.openxmlformats.org/presentationml/2006/main">
   <p:cSld>
     <p:spTree>
       <p:nvGrpSpPr>
@@ -4952,7 +4916,14 @@
         <p:cNvGrpSpPr/>
         <p:nvPr/>
       </p:nvGrpSpPr>
-      <p:grpSpPr/>
+      <p:grpSpPr>
+        <a:xfrm>
+          <a:off x="0" y="0"/>
+          <a:ext cx="0" cy="0"/>
+          <a:chOff x="0" y="0"/>
+          <a:chExt cx="0" cy="0"/>
+        </a:xfrm>
+      </p:grpSpPr>
       <p:sp>
         <p:nvSpPr>
           <p:cNvPr id="2" name="Rectangle 1"/>
@@ -4993,6 +4964,7 @@
           <a:lstStyle/>
           <a:p>
             <a:pPr algn="ctr"/>
+            <a:endParaRPr/>
           </a:p>
         </p:txBody>
       </p:sp>
@@ -5036,6 +5008,7 @@
           <a:lstStyle/>
           <a:p>
             <a:pPr algn="ctr"/>
+            <a:endParaRPr/>
           </a:p>
         </p:txBody>
       </p:sp>
@@ -5079,6 +5052,7 @@
           <a:lstStyle/>
           <a:p>
             <a:pPr algn="ctr"/>
+            <a:endParaRPr/>
           </a:p>
         </p:txBody>
       </p:sp>
@@ -5125,8 +5099,8 @@
         </p:nvSpPr>
         <p:spPr>
           <a:xfrm>
-            <a:off x="10378440" y="6528816"/>
-            <a:ext cx="1371600" cy="292608"/>
+            <a:off x="10378440" y="6544315"/>
+            <a:ext cx="1371600" cy="261610"/>
           </a:xfrm>
           <a:prstGeom prst="rect">
             <a:avLst/>
@@ -5141,27 +5115,174 @@
           <a:p>
             <a:pPr algn="r"/>
             <a:r>
-              <a:rPr sz="1100" b="0">
+              <a:rPr sz="1100" b="0" dirty="0">
                 <a:solidFill>
                   <a:srgbClr val="FFFFFF"/>
                 </a:solidFill>
                 <a:latin typeface="Calibri"/>
               </a:rPr>
-              <a:t>12 / 15</a:t>
-            </a:r>
-          </a:p>
-        </p:txBody>
-      </p:sp>
-      <p:sp>
-        <p:nvSpPr>
-          <p:cNvPr id="7" name="Rounded Rectangle 6"/>
+              <a:t>1</a:t>
+            </a:r>
+            <a:r>
+              <a:rPr lang="es-419" sz="1100" b="0" dirty="0">
+                <a:solidFill>
+                  <a:srgbClr val="FFFFFF"/>
+                </a:solidFill>
+                <a:latin typeface="Calibri"/>
+              </a:rPr>
+              <a:t>2</a:t>
+            </a:r>
+            <a:r>
+              <a:rPr sz="1100" b="0" dirty="0">
+                <a:solidFill>
+                  <a:srgbClr val="FFFFFF"/>
+                </a:solidFill>
+                <a:latin typeface="Calibri"/>
+              </a:rPr>
+              <a:t> / 1</a:t>
+            </a:r>
+            <a:r>
+              <a:rPr lang="es-419" sz="1100" b="0" dirty="0">
+                <a:solidFill>
+                  <a:srgbClr val="FFFFFF"/>
+                </a:solidFill>
+                <a:latin typeface="Calibri"/>
+              </a:rPr>
+              <a:t>3</a:t>
+            </a:r>
+            <a:endParaRPr sz="1100" b="0" dirty="0">
+              <a:solidFill>
+                <a:srgbClr val="FFFFFF"/>
+              </a:solidFill>
+              <a:latin typeface="Calibri"/>
+            </a:endParaRPr>
+          </a:p>
+        </p:txBody>
+      </p:sp>
+      <p:sp>
+        <p:nvSpPr>
+          <p:cNvPr id="7" name="TextBox 6"/>
+          <p:cNvSpPr txBox="1"/>
+          <p:nvPr/>
+        </p:nvSpPr>
+        <p:spPr>
+          <a:xfrm>
+            <a:off x="502920" y="256032"/>
+            <a:ext cx="11155680" cy="502920"/>
+          </a:xfrm>
+          <a:prstGeom prst="rect">
+            <a:avLst/>
+          </a:prstGeom>
+          <a:noFill/>
+        </p:spPr>
+        <p:txBody>
+          <a:bodyPr wrap="square" anchor="ctr">
+            <a:spAutoFit/>
+          </a:bodyPr>
+          <a:lstStyle/>
+          <a:p>
+            <a:pPr algn="l"/>
+            <a:r>
+              <a:rPr sz="2800" b="1">
+                <a:solidFill>
+                  <a:srgbClr val="0F2C59"/>
+                </a:solidFill>
+                <a:latin typeface="Calibri"/>
+              </a:rPr>
+              <a:t>Receta para el ejemplo</a:t>
+            </a:r>
+          </a:p>
+        </p:txBody>
+      </p:sp>
+      <p:sp>
+        <p:nvSpPr>
+          <p:cNvPr id="8" name="Rectangle 7"/>
           <p:cNvSpPr/>
           <p:nvPr/>
         </p:nvSpPr>
         <p:spPr>
           <a:xfrm>
+            <a:off x="502920" y="804672"/>
+            <a:ext cx="1280160" cy="54864"/>
+          </a:xfrm>
+          <a:prstGeom prst="rect">
+            <a:avLst/>
+          </a:prstGeom>
+          <a:solidFill>
+            <a:srgbClr val="E8B93A"/>
+          </a:solidFill>
+          <a:ln>
+            <a:noFill/>
+          </a:ln>
+        </p:spPr>
+        <p:style>
+          <a:lnRef idx="1">
+            <a:schemeClr val="accent1"/>
+          </a:lnRef>
+          <a:fillRef idx="3">
+            <a:schemeClr val="accent1"/>
+          </a:fillRef>
+          <a:effectRef idx="2">
+            <a:schemeClr val="accent1"/>
+          </a:effectRef>
+          <a:fontRef idx="minor">
+            <a:schemeClr val="lt1"/>
+          </a:fontRef>
+        </p:style>
+        <p:txBody>
+          <a:bodyPr rtlCol="0" anchor="ctr"/>
+          <a:lstStyle/>
+          <a:p>
+            <a:pPr algn="ctr"/>
+            <a:endParaRPr/>
+          </a:p>
+        </p:txBody>
+      </p:sp>
+      <p:sp>
+        <p:nvSpPr>
+          <p:cNvPr id="9" name="TextBox 8"/>
+          <p:cNvSpPr txBox="1"/>
+          <p:nvPr/>
+        </p:nvSpPr>
+        <p:spPr>
+          <a:xfrm>
+            <a:off x="502920" y="932688"/>
+            <a:ext cx="11155680" cy="365760"/>
+          </a:xfrm>
+          <a:prstGeom prst="rect">
+            <a:avLst/>
+          </a:prstGeom>
+          <a:noFill/>
+        </p:spPr>
+        <p:txBody>
+          <a:bodyPr wrap="square" anchor="ctr">
+            <a:spAutoFit/>
+          </a:bodyPr>
+          <a:lstStyle/>
+          <a:p>
+            <a:pPr algn="l"/>
+            <a:r>
+              <a:rPr sz="1600" b="0">
+                <a:solidFill>
+                  <a:srgbClr val="5D6D7E"/>
+                </a:solidFill>
+                <a:latin typeface="Calibri"/>
+              </a:rPr>
+              <a:t>Tres pasos que se pueden repetir en el pizarrón</a:t>
+            </a:r>
+          </a:p>
+        </p:txBody>
+      </p:sp>
+      <p:sp>
+        <p:nvSpPr>
+          <p:cNvPr id="10" name="Rounded Rectangle 9"/>
+          <p:cNvSpPr/>
+          <p:nvPr/>
+        </p:nvSpPr>
+        <p:spPr>
+          <a:xfrm>
             <a:off x="502920" y="1417320"/>
-            <a:ext cx="5349240" cy="4617720"/>
+            <a:ext cx="2788920" cy="4617720"/>
           </a:xfrm>
           <a:prstGeom prst="roundRect">
             <a:avLst>
@@ -5196,19 +5317,20 @@
           <a:lstStyle/>
           <a:p>
             <a:pPr algn="ctr"/>
-          </a:p>
-        </p:txBody>
-      </p:sp>
-      <p:sp>
-        <p:nvSpPr>
-          <p:cNvPr id="8" name="TextBox 7"/>
+            <a:endParaRPr/>
+          </a:p>
+        </p:txBody>
+      </p:sp>
+      <p:sp>
+        <p:nvSpPr>
+          <p:cNvPr id="11" name="TextBox 10"/>
           <p:cNvSpPr txBox="1"/>
           <p:nvPr/>
         </p:nvSpPr>
         <p:spPr>
           <a:xfrm>
-            <a:off x="777240" y="1645920"/>
-            <a:ext cx="4846320" cy="411480"/>
+            <a:off x="685800" y="1691640"/>
+            <a:ext cx="2423160" cy="411480"/>
           </a:xfrm>
           <a:prstGeom prst="rect">
             <a:avLst/>
@@ -5225,25 +5347,25 @@
             <a:r>
               <a:rPr sz="1800" b="1">
                 <a:solidFill>
-                  <a:srgbClr val="0F2C59"/>
-                </a:solidFill>
-                <a:latin typeface="Calibri"/>
-              </a:rPr>
-              <a:t>Razonamiento lógico</a:t>
-            </a:r>
-          </a:p>
-        </p:txBody>
-      </p:sp>
-      <p:sp>
-        <p:nvSpPr>
-          <p:cNvPr id="9" name="TextBox 8"/>
+                  <a:srgbClr val="1B6CA8"/>
+                </a:solidFill>
+                <a:latin typeface="Calibri"/>
+              </a:rPr>
+              <a:t>1</a:t>
+            </a:r>
+          </a:p>
+        </p:txBody>
+      </p:sp>
+      <p:sp>
+        <p:nvSpPr>
+          <p:cNvPr id="12" name="TextBox 11"/>
           <p:cNvSpPr txBox="1"/>
           <p:nvPr/>
         </p:nvSpPr>
         <p:spPr>
           <a:xfrm>
-            <a:off x="777240" y="2194560"/>
-            <a:ext cx="4846320" cy="3566160"/>
+            <a:off x="685800" y="2194560"/>
+            <a:ext cx="2423160" cy="731520"/>
           </a:xfrm>
           <a:prstGeom prst="rect">
             <a:avLst/>
@@ -5256,81 +5378,64 @@
           </a:bodyPr>
           <a:lstStyle/>
           <a:p>
-            <a:pPr>
-              <a:spcAft>
-                <a:spcPts val="1200"/>
-              </a:spcAft>
-            </a:pPr>
-            <a:r>
-              <a:rPr sz="1600" b="0">
+            <a:pPr algn="l"/>
+            <a:r>
+              <a:rPr sz="1800" b="1">
+                <a:solidFill>
+                  <a:srgbClr val="0F2C59"/>
+                </a:solidFill>
+                <a:latin typeface="Calibri"/>
+              </a:rPr>
+              <a:t>Grafo</a:t>
+            </a:r>
+          </a:p>
+        </p:txBody>
+      </p:sp>
+      <p:sp>
+        <p:nvSpPr>
+          <p:cNvPr id="13" name="TextBox 12"/>
+          <p:cNvSpPr txBox="1"/>
+          <p:nvPr/>
+        </p:nvSpPr>
+        <p:spPr>
+          <a:xfrm>
+            <a:off x="685800" y="3063240"/>
+            <a:ext cx="2423160" cy="2651760"/>
+          </a:xfrm>
+          <a:prstGeom prst="rect">
+            <a:avLst/>
+          </a:prstGeom>
+          <a:noFill/>
+        </p:spPr>
+        <p:txBody>
+          <a:bodyPr wrap="square" anchor="t">
+            <a:spAutoFit/>
+          </a:bodyPr>
+          <a:lstStyle/>
+          <a:p>
+            <a:pPr algn="l"/>
+            <a:r>
+              <a:rPr sz="1500" b="0">
                 <a:solidFill>
                   <a:srgbClr val="2C3E50"/>
                 </a:solidFill>
                 <a:latin typeface="Calibri"/>
               </a:rPr>
-              <a:t>•  Oraciones verdaderas o falsas.</a:t>
-            </a:r>
-          </a:p>
-          <a:p>
-            <a:pPr>
-              <a:spcAft>
-                <a:spcPts val="1200"/>
-              </a:spcAft>
-            </a:pPr>
-            <a:r>
-              <a:rPr sz="1600" b="0">
-                <a:solidFill>
-                  <a:srgbClr val="2C3E50"/>
-                </a:solidFill>
-                <a:latin typeface="Calibri"/>
-              </a:rPr>
-              <a:t>•  Entailment: se sigue o no se sigue.</a:t>
-            </a:r>
-          </a:p>
-          <a:p>
-            <a:pPr>
-              <a:spcAft>
-                <a:spcPts val="1200"/>
-              </a:spcAft>
-            </a:pPr>
-            <a:r>
-              <a:rPr sz="1600" b="0">
-                <a:solidFill>
-                  <a:srgbClr val="2C3E50"/>
-                </a:solidFill>
-                <a:latin typeface="Calibri"/>
-              </a:rPr>
-              <a:t>•  FC / BC / resolución recorren reglas.</a:t>
-            </a:r>
-          </a:p>
-          <a:p>
-            <a:pPr>
-              <a:spcAft>
-                <a:spcPts val="1200"/>
-              </a:spcAft>
-            </a:pPr>
-            <a:r>
-              <a:rPr sz="1600" b="0">
-                <a:solidFill>
-                  <a:srgbClr val="2C3E50"/>
-                </a:solidFill>
-                <a:latin typeface="Calibri"/>
-              </a:rPr>
-              <a:t>•  No hay «un poco más probable».</a:t>
-            </a:r>
-          </a:p>
-        </p:txBody>
-      </p:sp>
-      <p:sp>
-        <p:nvSpPr>
-          <p:cNvPr id="10" name="Rounded Rectangle 9"/>
+              <a:t>L y A → P. Escribir P(L,A,P) = P(L) P(A) P(P|L,A).</a:t>
+            </a:r>
+          </a:p>
+        </p:txBody>
+      </p:sp>
+      <p:sp>
+        <p:nvSpPr>
+          <p:cNvPr id="14" name="Rounded Rectangle 13"/>
           <p:cNvSpPr/>
           <p:nvPr/>
         </p:nvSpPr>
         <p:spPr>
           <a:xfrm>
-            <a:off x="6355080" y="1417320"/>
-            <a:ext cx="5349240" cy="4617720"/>
+            <a:off x="3383280" y="1417320"/>
+            <a:ext cx="2788920" cy="4617720"/>
           </a:xfrm>
           <a:prstGeom prst="roundRect">
             <a:avLst>
@@ -5365,19 +5470,20 @@
           <a:lstStyle/>
           <a:p>
             <a:pPr algn="ctr"/>
-          </a:p>
-        </p:txBody>
-      </p:sp>
-      <p:sp>
-        <p:nvSpPr>
-          <p:cNvPr id="11" name="TextBox 10"/>
+            <a:endParaRPr/>
+          </a:p>
+        </p:txBody>
+      </p:sp>
+      <p:sp>
+        <p:nvSpPr>
+          <p:cNvPr id="15" name="TextBox 14"/>
           <p:cNvSpPr txBox="1"/>
           <p:nvPr/>
         </p:nvSpPr>
         <p:spPr>
           <a:xfrm>
-            <a:off x="6629400" y="1645920"/>
-            <a:ext cx="4846320" cy="411480"/>
+            <a:off x="3566160" y="1691640"/>
+            <a:ext cx="2423160" cy="411480"/>
           </a:xfrm>
           <a:prstGeom prst="rect">
             <a:avLst/>
@@ -5394,25 +5500,25 @@
             <a:r>
               <a:rPr sz="1800" b="1">
                 <a:solidFill>
-                  <a:srgbClr val="0F2C59"/>
-                </a:solidFill>
-                <a:latin typeface="Calibri"/>
-              </a:rPr>
-              <a:t>Razonamiento probabilístico</a:t>
-            </a:r>
-          </a:p>
-        </p:txBody>
-      </p:sp>
-      <p:sp>
-        <p:nvSpPr>
-          <p:cNvPr id="12" name="TextBox 11"/>
+                  <a:srgbClr val="1B6CA8"/>
+                </a:solidFill>
+                <a:latin typeface="Calibri"/>
+              </a:rPr>
+              <a:t>2</a:t>
+            </a:r>
+          </a:p>
+        </p:txBody>
+      </p:sp>
+      <p:sp>
+        <p:nvSpPr>
+          <p:cNvPr id="16" name="TextBox 15"/>
           <p:cNvSpPr txBox="1"/>
           <p:nvPr/>
         </p:nvSpPr>
         <p:spPr>
           <a:xfrm>
-            <a:off x="6629400" y="2194560"/>
-            <a:ext cx="4846320" cy="3566160"/>
+            <a:off x="3566160" y="2194560"/>
+            <a:ext cx="2423160" cy="731520"/>
           </a:xfrm>
           <a:prstGeom prst="rect">
             <a:avLst/>
@@ -5425,67 +5531,356 @@
           </a:bodyPr>
           <a:lstStyle/>
           <a:p>
-            <a:pPr>
-              <a:spcAft>
-                <a:spcPts val="1200"/>
-              </a:spcAft>
-            </a:pPr>
-            <a:r>
-              <a:rPr sz="1600" b="0">
+            <a:pPr algn="l"/>
+            <a:r>
+              <a:rPr sz="1800" b="1">
+                <a:solidFill>
+                  <a:srgbClr val="0F2C59"/>
+                </a:solidFill>
+                <a:latin typeface="Calibri"/>
+              </a:rPr>
+              <a:t>Llenar CPT</a:t>
+            </a:r>
+          </a:p>
+        </p:txBody>
+      </p:sp>
+      <p:sp>
+        <p:nvSpPr>
+          <p:cNvPr id="17" name="TextBox 16"/>
+          <p:cNvSpPr txBox="1"/>
+          <p:nvPr/>
+        </p:nvSpPr>
+        <p:spPr>
+          <a:xfrm>
+            <a:off x="3566160" y="3063240"/>
+            <a:ext cx="2423160" cy="2651760"/>
+          </a:xfrm>
+          <a:prstGeom prst="rect">
+            <a:avLst/>
+          </a:prstGeom>
+          <a:noFill/>
+        </p:spPr>
+        <p:txBody>
+          <a:bodyPr wrap="square" anchor="t">
+            <a:spAutoFit/>
+          </a:bodyPr>
+          <a:lstStyle/>
+          <a:p>
+            <a:pPr algn="l"/>
+            <a:r>
+              <a:rPr sz="1500" b="0">
                 <a:solidFill>
                   <a:srgbClr val="2C3E50"/>
                 </a:solidFill>
                 <a:latin typeface="Calibri"/>
               </a:rPr>
-              <a:t>•  Variables con P(· | evidencia).</a:t>
-            </a:r>
-          </a:p>
-          <a:p>
-            <a:pPr>
-              <a:spcAft>
-                <a:spcPts val="1200"/>
-              </a:spcAft>
-            </a:pPr>
-            <a:r>
-              <a:rPr sz="1600" b="0">
+              <a:t>A prioris 0.20 y 0.10. Cuatro filas para el pasto.</a:t>
+            </a:r>
+          </a:p>
+        </p:txBody>
+      </p:sp>
+      <p:sp>
+        <p:nvSpPr>
+          <p:cNvPr id="18" name="Rounded Rectangle 17"/>
+          <p:cNvSpPr/>
+          <p:nvPr/>
+        </p:nvSpPr>
+        <p:spPr>
+          <a:xfrm>
+            <a:off x="6263640" y="1417320"/>
+            <a:ext cx="2788920" cy="4617720"/>
+          </a:xfrm>
+          <a:prstGeom prst="roundRect">
+            <a:avLst>
+              <a:gd name="adj" fmla="val 8000"/>
+            </a:avLst>
+          </a:prstGeom>
+          <a:solidFill>
+            <a:srgbClr val="F6F8FB"/>
+          </a:solidFill>
+          <a:ln w="15875">
+            <a:solidFill>
+              <a:srgbClr val="D5DEE8"/>
+            </a:solidFill>
+          </a:ln>
+        </p:spPr>
+        <p:style>
+          <a:lnRef idx="1">
+            <a:schemeClr val="accent1"/>
+          </a:lnRef>
+          <a:fillRef idx="3">
+            <a:schemeClr val="accent1"/>
+          </a:fillRef>
+          <a:effectRef idx="2">
+            <a:schemeClr val="accent1"/>
+          </a:effectRef>
+          <a:fontRef idx="minor">
+            <a:schemeClr val="lt1"/>
+          </a:fontRef>
+        </p:style>
+        <p:txBody>
+          <a:bodyPr rtlCol="0" anchor="ctr"/>
+          <a:lstStyle/>
+          <a:p>
+            <a:pPr algn="ctr"/>
+            <a:endParaRPr/>
+          </a:p>
+        </p:txBody>
+      </p:sp>
+      <p:sp>
+        <p:nvSpPr>
+          <p:cNvPr id="19" name="TextBox 18"/>
+          <p:cNvSpPr txBox="1"/>
+          <p:nvPr/>
+        </p:nvSpPr>
+        <p:spPr>
+          <a:xfrm>
+            <a:off x="6446520" y="1691640"/>
+            <a:ext cx="2423160" cy="411480"/>
+          </a:xfrm>
+          <a:prstGeom prst="rect">
+            <a:avLst/>
+          </a:prstGeom>
+          <a:noFill/>
+        </p:spPr>
+        <p:txBody>
+          <a:bodyPr wrap="square" anchor="t">
+            <a:spAutoFit/>
+          </a:bodyPr>
+          <a:lstStyle/>
+          <a:p>
+            <a:pPr algn="l"/>
+            <a:r>
+              <a:rPr sz="1800" b="1">
+                <a:solidFill>
+                  <a:srgbClr val="1B6CA8"/>
+                </a:solidFill>
+                <a:latin typeface="Calibri"/>
+              </a:rPr>
+              <a:t>3</a:t>
+            </a:r>
+          </a:p>
+        </p:txBody>
+      </p:sp>
+      <p:sp>
+        <p:nvSpPr>
+          <p:cNvPr id="20" name="TextBox 19"/>
+          <p:cNvSpPr txBox="1"/>
+          <p:nvPr/>
+        </p:nvSpPr>
+        <p:spPr>
+          <a:xfrm>
+            <a:off x="6446520" y="2194560"/>
+            <a:ext cx="2423160" cy="731520"/>
+          </a:xfrm>
+          <a:prstGeom prst="rect">
+            <a:avLst/>
+          </a:prstGeom>
+          <a:noFill/>
+        </p:spPr>
+        <p:txBody>
+          <a:bodyPr wrap="square" anchor="t">
+            <a:spAutoFit/>
+          </a:bodyPr>
+          <a:lstStyle/>
+          <a:p>
+            <a:pPr algn="l"/>
+            <a:r>
+              <a:rPr sz="1800" b="1">
+                <a:solidFill>
+                  <a:srgbClr val="0F2C59"/>
+                </a:solidFill>
+                <a:latin typeface="Calibri"/>
+              </a:rPr>
+              <a:t>Query</a:t>
+            </a:r>
+          </a:p>
+        </p:txBody>
+      </p:sp>
+      <p:sp>
+        <p:nvSpPr>
+          <p:cNvPr id="21" name="TextBox 20"/>
+          <p:cNvSpPr txBox="1"/>
+          <p:nvPr/>
+        </p:nvSpPr>
+        <p:spPr>
+          <a:xfrm>
+            <a:off x="6446520" y="3063240"/>
+            <a:ext cx="2423160" cy="2651760"/>
+          </a:xfrm>
+          <a:prstGeom prst="rect">
+            <a:avLst/>
+          </a:prstGeom>
+          <a:noFill/>
+        </p:spPr>
+        <p:txBody>
+          <a:bodyPr wrap="square" anchor="t">
+            <a:spAutoFit/>
+          </a:bodyPr>
+          <a:lstStyle/>
+          <a:p>
+            <a:pPr algn="l"/>
+            <a:r>
+              <a:rPr sz="1500" b="0">
                 <a:solidFill>
                   <a:srgbClr val="2C3E50"/>
                 </a:solidFill>
                 <a:latin typeface="Calibri"/>
               </a:rPr>
-              <a:t>•  La misma evidencia mueve un número (0.20 → 0.65).</a:t>
-            </a:r>
-          </a:p>
-          <a:p>
-            <a:pPr>
-              <a:spcAft>
-                <a:spcPts val="1200"/>
-              </a:spcAft>
-            </a:pPr>
-            <a:r>
-              <a:rPr sz="1600" b="0">
+              <a:t>Fijar P=t, sumar sobre A, normalizar las dos hipótesis de L.</a:t>
+            </a:r>
+          </a:p>
+        </p:txBody>
+      </p:sp>
+      <p:sp>
+        <p:nvSpPr>
+          <p:cNvPr id="22" name="Rounded Rectangle 21"/>
+          <p:cNvSpPr/>
+          <p:nvPr/>
+        </p:nvSpPr>
+        <p:spPr>
+          <a:xfrm>
+            <a:off x="9144000" y="1417320"/>
+            <a:ext cx="2788920" cy="4617720"/>
+          </a:xfrm>
+          <a:prstGeom prst="roundRect">
+            <a:avLst>
+              <a:gd name="adj" fmla="val 8000"/>
+            </a:avLst>
+          </a:prstGeom>
+          <a:solidFill>
+            <a:srgbClr val="F6F8FB"/>
+          </a:solidFill>
+          <a:ln w="15875">
+            <a:solidFill>
+              <a:srgbClr val="D5DEE8"/>
+            </a:solidFill>
+          </a:ln>
+        </p:spPr>
+        <p:style>
+          <a:lnRef idx="1">
+            <a:schemeClr val="accent1"/>
+          </a:lnRef>
+          <a:fillRef idx="3">
+            <a:schemeClr val="accent1"/>
+          </a:fillRef>
+          <a:effectRef idx="2">
+            <a:schemeClr val="accent1"/>
+          </a:effectRef>
+          <a:fontRef idx="minor">
+            <a:schemeClr val="lt1"/>
+          </a:fontRef>
+        </p:style>
+        <p:txBody>
+          <a:bodyPr rtlCol="0" anchor="ctr"/>
+          <a:lstStyle/>
+          <a:p>
+            <a:pPr algn="ctr"/>
+            <a:endParaRPr/>
+          </a:p>
+        </p:txBody>
+      </p:sp>
+      <p:sp>
+        <p:nvSpPr>
+          <p:cNvPr id="23" name="TextBox 22"/>
+          <p:cNvSpPr txBox="1"/>
+          <p:nvPr/>
+        </p:nvSpPr>
+        <p:spPr>
+          <a:xfrm>
+            <a:off x="9326880" y="1691640"/>
+            <a:ext cx="2423160" cy="411480"/>
+          </a:xfrm>
+          <a:prstGeom prst="rect">
+            <a:avLst/>
+          </a:prstGeom>
+          <a:noFill/>
+        </p:spPr>
+        <p:txBody>
+          <a:bodyPr wrap="square" anchor="t">
+            <a:spAutoFit/>
+          </a:bodyPr>
+          <a:lstStyle/>
+          <a:p>
+            <a:pPr algn="l"/>
+            <a:r>
+              <a:rPr sz="1800" b="1">
+                <a:solidFill>
+                  <a:srgbClr val="1B6CA8"/>
+                </a:solidFill>
+                <a:latin typeface="Calibri"/>
+              </a:rPr>
+              <a:t>4</a:t>
+            </a:r>
+          </a:p>
+        </p:txBody>
+      </p:sp>
+      <p:sp>
+        <p:nvSpPr>
+          <p:cNvPr id="24" name="TextBox 23"/>
+          <p:cNvSpPr txBox="1"/>
+          <p:nvPr/>
+        </p:nvSpPr>
+        <p:spPr>
+          <a:xfrm>
+            <a:off x="9326880" y="2194560"/>
+            <a:ext cx="2423160" cy="731520"/>
+          </a:xfrm>
+          <a:prstGeom prst="rect">
+            <a:avLst/>
+          </a:prstGeom>
+          <a:noFill/>
+        </p:spPr>
+        <p:txBody>
+          <a:bodyPr wrap="square" anchor="t">
+            <a:spAutoFit/>
+          </a:bodyPr>
+          <a:lstStyle/>
+          <a:p>
+            <a:pPr algn="l"/>
+            <a:r>
+              <a:rPr sz="1800" b="1">
+                <a:solidFill>
+                  <a:srgbClr val="0F2C59"/>
+                </a:solidFill>
+                <a:latin typeface="Calibri"/>
+              </a:rPr>
+              <a:t>Variante</a:t>
+            </a:r>
+          </a:p>
+        </p:txBody>
+      </p:sp>
+      <p:sp>
+        <p:nvSpPr>
+          <p:cNvPr id="25" name="TextBox 24"/>
+          <p:cNvSpPr txBox="1"/>
+          <p:nvPr/>
+        </p:nvSpPr>
+        <p:spPr>
+          <a:xfrm>
+            <a:off x="9326880" y="3063240"/>
+            <a:ext cx="2423160" cy="2651760"/>
+          </a:xfrm>
+          <a:prstGeom prst="rect">
+            <a:avLst/>
+          </a:prstGeom>
+          <a:noFill/>
+        </p:spPr>
+        <p:txBody>
+          <a:bodyPr wrap="square" anchor="t">
+            <a:spAutoFit/>
+          </a:bodyPr>
+          <a:lstStyle/>
+          <a:p>
+            <a:pPr algn="l"/>
+            <a:r>
+              <a:rPr sz="1500" b="0">
                 <a:solidFill>
                   <a:srgbClr val="2C3E50"/>
                 </a:solidFill>
                 <a:latin typeface="Calibri"/>
               </a:rPr>
-              <a:t>•  El grafo dice qué independencias usar.</a:t>
-            </a:r>
-          </a:p>
-          <a:p>
-            <a:pPr>
-              <a:spcAft>
-                <a:spcPts val="1200"/>
-              </a:spcAft>
-            </a:pPr>
-            <a:r>
-              <a:rPr sz="1600" b="0">
-                <a:solidFill>
-                  <a:srgbClr val="2C3E50"/>
-                </a:solidFill>
-                <a:latin typeface="Calibri"/>
-              </a:rPr>
-              <a:t>•  Explaining away no existe en Horn.</a:t>
+              <a:t>Añadir A=t y repetir: explaining away.</a:t>
             </a:r>
           </a:p>
         </p:txBody>
@@ -5499,7 +5894,7 @@
 </file>
 
 <file path=ppt/slides/slide13.xml><?xml version="1.0" encoding="utf-8"?>
-<p:sld xmlns:a="http://schemas.openxmlformats.org/drawingml/2006/main" xmlns:p="http://schemas.openxmlformats.org/presentationml/2006/main" xmlns:r="http://schemas.openxmlformats.org/officeDocument/2006/relationships">
+<p:sld xmlns:a="http://schemas.openxmlformats.org/drawingml/2006/main" xmlns:r="http://schemas.openxmlformats.org/officeDocument/2006/relationships" xmlns:p="http://schemas.openxmlformats.org/presentationml/2006/main">
   <p:cSld>
     <p:spTree>
       <p:nvGrpSpPr>
@@ -5507,7 +5902,14 @@
         <p:cNvGrpSpPr/>
         <p:nvPr/>
       </p:nvGrpSpPr>
-      <p:grpSpPr/>
+      <p:grpSpPr>
+        <a:xfrm>
+          <a:off x="0" y="0"/>
+          <a:ext cx="0" cy="0"/>
+          <a:chOff x="0" y="0"/>
+          <a:chExt cx="0" cy="0"/>
+        </a:xfrm>
+      </p:grpSpPr>
       <p:sp>
         <p:nvSpPr>
           <p:cNvPr id="2" name="Rectangle 1"/>
@@ -5548,6 +5950,7 @@
           <a:lstStyle/>
           <a:p>
             <a:pPr algn="ctr"/>
+            <a:endParaRPr/>
           </a:p>
         </p:txBody>
       </p:sp>
@@ -5591,6 +5994,7 @@
           <a:lstStyle/>
           <a:p>
             <a:pPr algn="ctr"/>
+            <a:endParaRPr/>
           </a:p>
         </p:txBody>
       </p:sp>
@@ -5634,6 +6038,7 @@
           <a:lstStyle/>
           <a:p>
             <a:pPr algn="ctr"/>
+            <a:endParaRPr/>
           </a:p>
         </p:txBody>
       </p:sp>
@@ -5680,8 +6085,8 @@
         </p:nvSpPr>
         <p:spPr>
           <a:xfrm>
-            <a:off x="10378440" y="6528816"/>
-            <a:ext cx="1371600" cy="292608"/>
+            <a:off x="10378440" y="6544315"/>
+            <a:ext cx="1371600" cy="261610"/>
           </a:xfrm>
           <a:prstGeom prst="rect">
             <a:avLst/>
@@ -5696,14 +6101,47 @@
           <a:p>
             <a:pPr algn="r"/>
             <a:r>
-              <a:rPr sz="1100" b="0">
+              <a:rPr sz="1100" b="0" dirty="0">
                 <a:solidFill>
                   <a:srgbClr val="FFFFFF"/>
                 </a:solidFill>
                 <a:latin typeface="Calibri"/>
               </a:rPr>
-              <a:t>13 / 15</a:t>
-            </a:r>
+              <a:t>1</a:t>
+            </a:r>
+            <a:r>
+              <a:rPr lang="es-419" sz="1100" b="0" dirty="0">
+                <a:solidFill>
+                  <a:srgbClr val="FFFFFF"/>
+                </a:solidFill>
+                <a:latin typeface="Calibri"/>
+              </a:rPr>
+              <a:t>3</a:t>
+            </a:r>
+            <a:r>
+              <a:rPr sz="1100" b="0" dirty="0">
+                <a:solidFill>
+                  <a:srgbClr val="FFFFFF"/>
+                </a:solidFill>
+                <a:latin typeface="Calibri"/>
+              </a:rPr>
+              <a:t> / 1</a:t>
+            </a:r>
+            <a:r>
+              <a:rPr lang="es-419" sz="1100" b="0" dirty="0">
+                <a:solidFill>
+                  <a:srgbClr val="FFFFFF"/>
+                </a:solidFill>
+                <a:latin typeface="Calibri"/>
+              </a:rPr>
+              <a:t>3</a:t>
+            </a:r>
+            <a:endParaRPr sz="1100" b="0" dirty="0">
+              <a:solidFill>
+                <a:srgbClr val="FFFFFF"/>
+              </a:solidFill>
+              <a:latin typeface="Calibri"/>
+            </a:endParaRPr>
           </a:p>
         </p:txBody>
       </p:sp>
@@ -5715,8 +6153,8 @@
         </p:nvSpPr>
         <p:spPr>
           <a:xfrm>
-            <a:off x="502920" y="256032"/>
-            <a:ext cx="11155680" cy="502920"/>
+            <a:off x="502920" y="245882"/>
+            <a:ext cx="11155680" cy="523220"/>
           </a:xfrm>
           <a:prstGeom prst="rect">
             <a:avLst/>
@@ -5731,14 +6169,20 @@
           <a:p>
             <a:pPr algn="l"/>
             <a:r>
-              <a:rPr sz="2800" b="1">
+              <a:rPr lang="es-419" sz="2800" b="1" dirty="0">
                 <a:solidFill>
                   <a:srgbClr val="0F2C59"/>
                 </a:solidFill>
                 <a:latin typeface="Calibri"/>
               </a:rPr>
-              <a:t>Receta para el ejemplo</a:t>
-            </a:r>
+              <a:t>Resumen</a:t>
+            </a:r>
+            <a:endParaRPr sz="2800" b="1" dirty="0">
+              <a:solidFill>
+                <a:srgbClr val="0F2C59"/>
+              </a:solidFill>
+              <a:latin typeface="Calibri"/>
+            </a:endParaRPr>
           </a:p>
         </p:txBody>
       </p:sp>
@@ -5782,54 +6226,20 @@
           <a:lstStyle/>
           <a:p>
             <a:pPr algn="ctr"/>
-          </a:p>
-        </p:txBody>
-      </p:sp>
-      <p:sp>
-        <p:nvSpPr>
-          <p:cNvPr id="9" name="TextBox 8"/>
-          <p:cNvSpPr txBox="1"/>
-          <p:nvPr/>
-        </p:nvSpPr>
-        <p:spPr>
-          <a:xfrm>
-            <a:off x="502920" y="932688"/>
-            <a:ext cx="11155680" cy="365760"/>
-          </a:xfrm>
-          <a:prstGeom prst="rect">
-            <a:avLst/>
-          </a:prstGeom>
-          <a:noFill/>
-        </p:spPr>
-        <p:txBody>
-          <a:bodyPr wrap="square" anchor="ctr">
-            <a:spAutoFit/>
-          </a:bodyPr>
-          <a:lstStyle/>
-          <a:p>
-            <a:pPr algn="l"/>
-            <a:r>
-              <a:rPr sz="1600" b="0">
-                <a:solidFill>
-                  <a:srgbClr val="5D6D7E"/>
-                </a:solidFill>
-                <a:latin typeface="Calibri"/>
-              </a:rPr>
-              <a:t>Tres pasos que se pueden repetir en el pizarrón</a:t>
-            </a:r>
-          </a:p>
-        </p:txBody>
-      </p:sp>
-      <p:sp>
-        <p:nvSpPr>
-          <p:cNvPr id="10" name="Rounded Rectangle 9"/>
+            <a:endParaRPr/>
+          </a:p>
+        </p:txBody>
+      </p:sp>
+      <p:sp>
+        <p:nvSpPr>
+          <p:cNvPr id="9" name="Rounded Rectangle 8"/>
           <p:cNvSpPr/>
           <p:nvPr/>
         </p:nvSpPr>
         <p:spPr>
           <a:xfrm>
             <a:off x="502920" y="1417320"/>
-            <a:ext cx="2788920" cy="4617720"/>
+            <a:ext cx="11155680" cy="4617720"/>
           </a:xfrm>
           <a:prstGeom prst="roundRect">
             <a:avLst>
@@ -5864,909 +6274,7 @@
           <a:lstStyle/>
           <a:p>
             <a:pPr algn="ctr"/>
-          </a:p>
-        </p:txBody>
-      </p:sp>
-      <p:sp>
-        <p:nvSpPr>
-          <p:cNvPr id="11" name="TextBox 10"/>
-          <p:cNvSpPr txBox="1"/>
-          <p:nvPr/>
-        </p:nvSpPr>
-        <p:spPr>
-          <a:xfrm>
-            <a:off x="685800" y="1691640"/>
-            <a:ext cx="2423160" cy="411480"/>
-          </a:xfrm>
-          <a:prstGeom prst="rect">
-            <a:avLst/>
-          </a:prstGeom>
-          <a:noFill/>
-        </p:spPr>
-        <p:txBody>
-          <a:bodyPr wrap="square" anchor="t">
-            <a:spAutoFit/>
-          </a:bodyPr>
-          <a:lstStyle/>
-          <a:p>
-            <a:pPr algn="l"/>
-            <a:r>
-              <a:rPr sz="1800" b="1">
-                <a:solidFill>
-                  <a:srgbClr val="1B6CA8"/>
-                </a:solidFill>
-                <a:latin typeface="Calibri"/>
-              </a:rPr>
-              <a:t>1</a:t>
-            </a:r>
-          </a:p>
-        </p:txBody>
-      </p:sp>
-      <p:sp>
-        <p:nvSpPr>
-          <p:cNvPr id="12" name="TextBox 11"/>
-          <p:cNvSpPr txBox="1"/>
-          <p:nvPr/>
-        </p:nvSpPr>
-        <p:spPr>
-          <a:xfrm>
-            <a:off x="685800" y="2194560"/>
-            <a:ext cx="2423160" cy="731520"/>
-          </a:xfrm>
-          <a:prstGeom prst="rect">
-            <a:avLst/>
-          </a:prstGeom>
-          <a:noFill/>
-        </p:spPr>
-        <p:txBody>
-          <a:bodyPr wrap="square" anchor="t">
-            <a:spAutoFit/>
-          </a:bodyPr>
-          <a:lstStyle/>
-          <a:p>
-            <a:pPr algn="l"/>
-            <a:r>
-              <a:rPr sz="1800" b="1">
-                <a:solidFill>
-                  <a:srgbClr val="0F2C59"/>
-                </a:solidFill>
-                <a:latin typeface="Calibri"/>
-              </a:rPr>
-              <a:t>Grafo</a:t>
-            </a:r>
-          </a:p>
-        </p:txBody>
-      </p:sp>
-      <p:sp>
-        <p:nvSpPr>
-          <p:cNvPr id="13" name="TextBox 12"/>
-          <p:cNvSpPr txBox="1"/>
-          <p:nvPr/>
-        </p:nvSpPr>
-        <p:spPr>
-          <a:xfrm>
-            <a:off x="685800" y="3063240"/>
-            <a:ext cx="2423160" cy="2651760"/>
-          </a:xfrm>
-          <a:prstGeom prst="rect">
-            <a:avLst/>
-          </a:prstGeom>
-          <a:noFill/>
-        </p:spPr>
-        <p:txBody>
-          <a:bodyPr wrap="square" anchor="t">
-            <a:spAutoFit/>
-          </a:bodyPr>
-          <a:lstStyle/>
-          <a:p>
-            <a:pPr algn="l"/>
-            <a:r>
-              <a:rPr sz="1500" b="0">
-                <a:solidFill>
-                  <a:srgbClr val="2C3E50"/>
-                </a:solidFill>
-                <a:latin typeface="Calibri"/>
-              </a:rPr>
-              <a:t>L y A → P. Escribir P(L,A,P) = P(L) P(A) P(P|L,A).</a:t>
-            </a:r>
-          </a:p>
-        </p:txBody>
-      </p:sp>
-      <p:sp>
-        <p:nvSpPr>
-          <p:cNvPr id="14" name="Rounded Rectangle 13"/>
-          <p:cNvSpPr/>
-          <p:nvPr/>
-        </p:nvSpPr>
-        <p:spPr>
-          <a:xfrm>
-            <a:off x="3383280" y="1417320"/>
-            <a:ext cx="2788920" cy="4617720"/>
-          </a:xfrm>
-          <a:prstGeom prst="roundRect">
-            <a:avLst>
-              <a:gd name="adj" fmla="val 8000"/>
-            </a:avLst>
-          </a:prstGeom>
-          <a:solidFill>
-            <a:srgbClr val="F6F8FB"/>
-          </a:solidFill>
-          <a:ln w="15875">
-            <a:solidFill>
-              <a:srgbClr val="D5DEE8"/>
-            </a:solidFill>
-          </a:ln>
-        </p:spPr>
-        <p:style>
-          <a:lnRef idx="1">
-            <a:schemeClr val="accent1"/>
-          </a:lnRef>
-          <a:fillRef idx="3">
-            <a:schemeClr val="accent1"/>
-          </a:fillRef>
-          <a:effectRef idx="2">
-            <a:schemeClr val="accent1"/>
-          </a:effectRef>
-          <a:fontRef idx="minor">
-            <a:schemeClr val="lt1"/>
-          </a:fontRef>
-        </p:style>
-        <p:txBody>
-          <a:bodyPr rtlCol="0" anchor="ctr"/>
-          <a:lstStyle/>
-          <a:p>
-            <a:pPr algn="ctr"/>
-          </a:p>
-        </p:txBody>
-      </p:sp>
-      <p:sp>
-        <p:nvSpPr>
-          <p:cNvPr id="15" name="TextBox 14"/>
-          <p:cNvSpPr txBox="1"/>
-          <p:nvPr/>
-        </p:nvSpPr>
-        <p:spPr>
-          <a:xfrm>
-            <a:off x="3566160" y="1691640"/>
-            <a:ext cx="2423160" cy="411480"/>
-          </a:xfrm>
-          <a:prstGeom prst="rect">
-            <a:avLst/>
-          </a:prstGeom>
-          <a:noFill/>
-        </p:spPr>
-        <p:txBody>
-          <a:bodyPr wrap="square" anchor="t">
-            <a:spAutoFit/>
-          </a:bodyPr>
-          <a:lstStyle/>
-          <a:p>
-            <a:pPr algn="l"/>
-            <a:r>
-              <a:rPr sz="1800" b="1">
-                <a:solidFill>
-                  <a:srgbClr val="1B6CA8"/>
-                </a:solidFill>
-                <a:latin typeface="Calibri"/>
-              </a:rPr>
-              <a:t>2</a:t>
-            </a:r>
-          </a:p>
-        </p:txBody>
-      </p:sp>
-      <p:sp>
-        <p:nvSpPr>
-          <p:cNvPr id="16" name="TextBox 15"/>
-          <p:cNvSpPr txBox="1"/>
-          <p:nvPr/>
-        </p:nvSpPr>
-        <p:spPr>
-          <a:xfrm>
-            <a:off x="3566160" y="2194560"/>
-            <a:ext cx="2423160" cy="731520"/>
-          </a:xfrm>
-          <a:prstGeom prst="rect">
-            <a:avLst/>
-          </a:prstGeom>
-          <a:noFill/>
-        </p:spPr>
-        <p:txBody>
-          <a:bodyPr wrap="square" anchor="t">
-            <a:spAutoFit/>
-          </a:bodyPr>
-          <a:lstStyle/>
-          <a:p>
-            <a:pPr algn="l"/>
-            <a:r>
-              <a:rPr sz="1800" b="1">
-                <a:solidFill>
-                  <a:srgbClr val="0F2C59"/>
-                </a:solidFill>
-                <a:latin typeface="Calibri"/>
-              </a:rPr>
-              <a:t>Llenar CPT</a:t>
-            </a:r>
-          </a:p>
-        </p:txBody>
-      </p:sp>
-      <p:sp>
-        <p:nvSpPr>
-          <p:cNvPr id="17" name="TextBox 16"/>
-          <p:cNvSpPr txBox="1"/>
-          <p:nvPr/>
-        </p:nvSpPr>
-        <p:spPr>
-          <a:xfrm>
-            <a:off x="3566160" y="3063240"/>
-            <a:ext cx="2423160" cy="2651760"/>
-          </a:xfrm>
-          <a:prstGeom prst="rect">
-            <a:avLst/>
-          </a:prstGeom>
-          <a:noFill/>
-        </p:spPr>
-        <p:txBody>
-          <a:bodyPr wrap="square" anchor="t">
-            <a:spAutoFit/>
-          </a:bodyPr>
-          <a:lstStyle/>
-          <a:p>
-            <a:pPr algn="l"/>
-            <a:r>
-              <a:rPr sz="1500" b="0">
-                <a:solidFill>
-                  <a:srgbClr val="2C3E50"/>
-                </a:solidFill>
-                <a:latin typeface="Calibri"/>
-              </a:rPr>
-              <a:t>A prioris 0.20 y 0.10. Cuatro filas para el pasto.</a:t>
-            </a:r>
-          </a:p>
-        </p:txBody>
-      </p:sp>
-      <p:sp>
-        <p:nvSpPr>
-          <p:cNvPr id="18" name="Rounded Rectangle 17"/>
-          <p:cNvSpPr/>
-          <p:nvPr/>
-        </p:nvSpPr>
-        <p:spPr>
-          <a:xfrm>
-            <a:off x="6263640" y="1417320"/>
-            <a:ext cx="2788920" cy="4617720"/>
-          </a:xfrm>
-          <a:prstGeom prst="roundRect">
-            <a:avLst>
-              <a:gd name="adj" fmla="val 8000"/>
-            </a:avLst>
-          </a:prstGeom>
-          <a:solidFill>
-            <a:srgbClr val="F6F8FB"/>
-          </a:solidFill>
-          <a:ln w="15875">
-            <a:solidFill>
-              <a:srgbClr val="D5DEE8"/>
-            </a:solidFill>
-          </a:ln>
-        </p:spPr>
-        <p:style>
-          <a:lnRef idx="1">
-            <a:schemeClr val="accent1"/>
-          </a:lnRef>
-          <a:fillRef idx="3">
-            <a:schemeClr val="accent1"/>
-          </a:fillRef>
-          <a:effectRef idx="2">
-            <a:schemeClr val="accent1"/>
-          </a:effectRef>
-          <a:fontRef idx="minor">
-            <a:schemeClr val="lt1"/>
-          </a:fontRef>
-        </p:style>
-        <p:txBody>
-          <a:bodyPr rtlCol="0" anchor="ctr"/>
-          <a:lstStyle/>
-          <a:p>
-            <a:pPr algn="ctr"/>
-          </a:p>
-        </p:txBody>
-      </p:sp>
-      <p:sp>
-        <p:nvSpPr>
-          <p:cNvPr id="19" name="TextBox 18"/>
-          <p:cNvSpPr txBox="1"/>
-          <p:nvPr/>
-        </p:nvSpPr>
-        <p:spPr>
-          <a:xfrm>
-            <a:off x="6446520" y="1691640"/>
-            <a:ext cx="2423160" cy="411480"/>
-          </a:xfrm>
-          <a:prstGeom prst="rect">
-            <a:avLst/>
-          </a:prstGeom>
-          <a:noFill/>
-        </p:spPr>
-        <p:txBody>
-          <a:bodyPr wrap="square" anchor="t">
-            <a:spAutoFit/>
-          </a:bodyPr>
-          <a:lstStyle/>
-          <a:p>
-            <a:pPr algn="l"/>
-            <a:r>
-              <a:rPr sz="1800" b="1">
-                <a:solidFill>
-                  <a:srgbClr val="1B6CA8"/>
-                </a:solidFill>
-                <a:latin typeface="Calibri"/>
-              </a:rPr>
-              <a:t>3</a:t>
-            </a:r>
-          </a:p>
-        </p:txBody>
-      </p:sp>
-      <p:sp>
-        <p:nvSpPr>
-          <p:cNvPr id="20" name="TextBox 19"/>
-          <p:cNvSpPr txBox="1"/>
-          <p:nvPr/>
-        </p:nvSpPr>
-        <p:spPr>
-          <a:xfrm>
-            <a:off x="6446520" y="2194560"/>
-            <a:ext cx="2423160" cy="731520"/>
-          </a:xfrm>
-          <a:prstGeom prst="rect">
-            <a:avLst/>
-          </a:prstGeom>
-          <a:noFill/>
-        </p:spPr>
-        <p:txBody>
-          <a:bodyPr wrap="square" anchor="t">
-            <a:spAutoFit/>
-          </a:bodyPr>
-          <a:lstStyle/>
-          <a:p>
-            <a:pPr algn="l"/>
-            <a:r>
-              <a:rPr sz="1800" b="1">
-                <a:solidFill>
-                  <a:srgbClr val="0F2C59"/>
-                </a:solidFill>
-                <a:latin typeface="Calibri"/>
-              </a:rPr>
-              <a:t>Query</a:t>
-            </a:r>
-          </a:p>
-        </p:txBody>
-      </p:sp>
-      <p:sp>
-        <p:nvSpPr>
-          <p:cNvPr id="21" name="TextBox 20"/>
-          <p:cNvSpPr txBox="1"/>
-          <p:nvPr/>
-        </p:nvSpPr>
-        <p:spPr>
-          <a:xfrm>
-            <a:off x="6446520" y="3063240"/>
-            <a:ext cx="2423160" cy="2651760"/>
-          </a:xfrm>
-          <a:prstGeom prst="rect">
-            <a:avLst/>
-          </a:prstGeom>
-          <a:noFill/>
-        </p:spPr>
-        <p:txBody>
-          <a:bodyPr wrap="square" anchor="t">
-            <a:spAutoFit/>
-          </a:bodyPr>
-          <a:lstStyle/>
-          <a:p>
-            <a:pPr algn="l"/>
-            <a:r>
-              <a:rPr sz="1500" b="0">
-                <a:solidFill>
-                  <a:srgbClr val="2C3E50"/>
-                </a:solidFill>
-                <a:latin typeface="Calibri"/>
-              </a:rPr>
-              <a:t>Fijar P=t, sumar sobre A, normalizar las dos hipótesis de L.</a:t>
-            </a:r>
-          </a:p>
-        </p:txBody>
-      </p:sp>
-      <p:sp>
-        <p:nvSpPr>
-          <p:cNvPr id="22" name="Rounded Rectangle 21"/>
-          <p:cNvSpPr/>
-          <p:nvPr/>
-        </p:nvSpPr>
-        <p:spPr>
-          <a:xfrm>
-            <a:off x="9144000" y="1417320"/>
-            <a:ext cx="2788920" cy="4617720"/>
-          </a:xfrm>
-          <a:prstGeom prst="roundRect">
-            <a:avLst>
-              <a:gd name="adj" fmla="val 8000"/>
-            </a:avLst>
-          </a:prstGeom>
-          <a:solidFill>
-            <a:srgbClr val="F6F8FB"/>
-          </a:solidFill>
-          <a:ln w="15875">
-            <a:solidFill>
-              <a:srgbClr val="D5DEE8"/>
-            </a:solidFill>
-          </a:ln>
-        </p:spPr>
-        <p:style>
-          <a:lnRef idx="1">
-            <a:schemeClr val="accent1"/>
-          </a:lnRef>
-          <a:fillRef idx="3">
-            <a:schemeClr val="accent1"/>
-          </a:fillRef>
-          <a:effectRef idx="2">
-            <a:schemeClr val="accent1"/>
-          </a:effectRef>
-          <a:fontRef idx="minor">
-            <a:schemeClr val="lt1"/>
-          </a:fontRef>
-        </p:style>
-        <p:txBody>
-          <a:bodyPr rtlCol="0" anchor="ctr"/>
-          <a:lstStyle/>
-          <a:p>
-            <a:pPr algn="ctr"/>
-          </a:p>
-        </p:txBody>
-      </p:sp>
-      <p:sp>
-        <p:nvSpPr>
-          <p:cNvPr id="23" name="TextBox 22"/>
-          <p:cNvSpPr txBox="1"/>
-          <p:nvPr/>
-        </p:nvSpPr>
-        <p:spPr>
-          <a:xfrm>
-            <a:off x="9326880" y="1691640"/>
-            <a:ext cx="2423160" cy="411480"/>
-          </a:xfrm>
-          <a:prstGeom prst="rect">
-            <a:avLst/>
-          </a:prstGeom>
-          <a:noFill/>
-        </p:spPr>
-        <p:txBody>
-          <a:bodyPr wrap="square" anchor="t">
-            <a:spAutoFit/>
-          </a:bodyPr>
-          <a:lstStyle/>
-          <a:p>
-            <a:pPr algn="l"/>
-            <a:r>
-              <a:rPr sz="1800" b="1">
-                <a:solidFill>
-                  <a:srgbClr val="1B6CA8"/>
-                </a:solidFill>
-                <a:latin typeface="Calibri"/>
-              </a:rPr>
-              <a:t>4</a:t>
-            </a:r>
-          </a:p>
-        </p:txBody>
-      </p:sp>
-      <p:sp>
-        <p:nvSpPr>
-          <p:cNvPr id="24" name="TextBox 23"/>
-          <p:cNvSpPr txBox="1"/>
-          <p:nvPr/>
-        </p:nvSpPr>
-        <p:spPr>
-          <a:xfrm>
-            <a:off x="9326880" y="2194560"/>
-            <a:ext cx="2423160" cy="731520"/>
-          </a:xfrm>
-          <a:prstGeom prst="rect">
-            <a:avLst/>
-          </a:prstGeom>
-          <a:noFill/>
-        </p:spPr>
-        <p:txBody>
-          <a:bodyPr wrap="square" anchor="t">
-            <a:spAutoFit/>
-          </a:bodyPr>
-          <a:lstStyle/>
-          <a:p>
-            <a:pPr algn="l"/>
-            <a:r>
-              <a:rPr sz="1800" b="1">
-                <a:solidFill>
-                  <a:srgbClr val="0F2C59"/>
-                </a:solidFill>
-                <a:latin typeface="Calibri"/>
-              </a:rPr>
-              <a:t>Variante</a:t>
-            </a:r>
-          </a:p>
-        </p:txBody>
-      </p:sp>
-      <p:sp>
-        <p:nvSpPr>
-          <p:cNvPr id="25" name="TextBox 24"/>
-          <p:cNvSpPr txBox="1"/>
-          <p:nvPr/>
-        </p:nvSpPr>
-        <p:spPr>
-          <a:xfrm>
-            <a:off x="9326880" y="3063240"/>
-            <a:ext cx="2423160" cy="2651760"/>
-          </a:xfrm>
-          <a:prstGeom prst="rect">
-            <a:avLst/>
-          </a:prstGeom>
-          <a:noFill/>
-        </p:spPr>
-        <p:txBody>
-          <a:bodyPr wrap="square" anchor="t">
-            <a:spAutoFit/>
-          </a:bodyPr>
-          <a:lstStyle/>
-          <a:p>
-            <a:pPr algn="l"/>
-            <a:r>
-              <a:rPr sz="1500" b="0">
-                <a:solidFill>
-                  <a:srgbClr val="2C3E50"/>
-                </a:solidFill>
-                <a:latin typeface="Calibri"/>
-              </a:rPr>
-              <a:t>Añadir A=t y repetir: explaining away.</a:t>
-            </a:r>
-          </a:p>
-        </p:txBody>
-      </p:sp>
-    </p:spTree>
-  </p:cSld>
-  <p:clrMapOvr>
-    <a:masterClrMapping/>
-  </p:clrMapOvr>
-</p:sld>
-</file>
-
-<file path=ppt/slides/slide14.xml><?xml version="1.0" encoding="utf-8"?>
-<p:sld xmlns:a="http://schemas.openxmlformats.org/drawingml/2006/main" xmlns:p="http://schemas.openxmlformats.org/presentationml/2006/main" xmlns:r="http://schemas.openxmlformats.org/officeDocument/2006/relationships">
-  <p:cSld>
-    <p:spTree>
-      <p:nvGrpSpPr>
-        <p:cNvPr id="1" name=""/>
-        <p:cNvGrpSpPr/>
-        <p:nvPr/>
-      </p:nvGrpSpPr>
-      <p:grpSpPr/>
-      <p:sp>
-        <p:nvSpPr>
-          <p:cNvPr id="2" name="Rectangle 1"/>
-          <p:cNvSpPr/>
-          <p:nvPr/>
-        </p:nvSpPr>
-        <p:spPr>
-          <a:xfrm>
-            <a:off x="0" y="0"/>
-            <a:ext cx="12191999" cy="6858000"/>
-          </a:xfrm>
-          <a:prstGeom prst="rect">
-            <a:avLst/>
-          </a:prstGeom>
-          <a:solidFill>
-            <a:srgbClr val="FFFFFF"/>
-          </a:solidFill>
-          <a:ln>
-            <a:noFill/>
-          </a:ln>
-        </p:spPr>
-        <p:style>
-          <a:lnRef idx="1">
-            <a:schemeClr val="accent1"/>
-          </a:lnRef>
-          <a:fillRef idx="3">
-            <a:schemeClr val="accent1"/>
-          </a:fillRef>
-          <a:effectRef idx="2">
-            <a:schemeClr val="accent1"/>
-          </a:effectRef>
-          <a:fontRef idx="minor">
-            <a:schemeClr val="lt1"/>
-          </a:fontRef>
-        </p:style>
-        <p:txBody>
-          <a:bodyPr rtlCol="0" anchor="ctr"/>
-          <a:lstStyle/>
-          <a:p>
-            <a:pPr algn="ctr"/>
-          </a:p>
-        </p:txBody>
-      </p:sp>
-      <p:sp>
-        <p:nvSpPr>
-          <p:cNvPr id="3" name="Rectangle 2"/>
-          <p:cNvSpPr/>
-          <p:nvPr/>
-        </p:nvSpPr>
-        <p:spPr>
-          <a:xfrm>
-            <a:off x="0" y="0"/>
-            <a:ext cx="109728" cy="6858000"/>
-          </a:xfrm>
-          <a:prstGeom prst="rect">
-            <a:avLst/>
-          </a:prstGeom>
-          <a:solidFill>
-            <a:srgbClr val="E8B93A"/>
-          </a:solidFill>
-          <a:ln>
-            <a:noFill/>
-          </a:ln>
-        </p:spPr>
-        <p:style>
-          <a:lnRef idx="1">
-            <a:schemeClr val="accent1"/>
-          </a:lnRef>
-          <a:fillRef idx="3">
-            <a:schemeClr val="accent1"/>
-          </a:fillRef>
-          <a:effectRef idx="2">
-            <a:schemeClr val="accent1"/>
-          </a:effectRef>
-          <a:fontRef idx="minor">
-            <a:schemeClr val="lt1"/>
-          </a:fontRef>
-        </p:style>
-        <p:txBody>
-          <a:bodyPr rtlCol="0" anchor="ctr"/>
-          <a:lstStyle/>
-          <a:p>
-            <a:pPr algn="ctr"/>
-          </a:p>
-        </p:txBody>
-      </p:sp>
-      <p:sp>
-        <p:nvSpPr>
-          <p:cNvPr id="4" name="Rectangle 3"/>
-          <p:cNvSpPr/>
-          <p:nvPr/>
-        </p:nvSpPr>
-        <p:spPr>
-          <a:xfrm>
-            <a:off x="0" y="6510528"/>
-            <a:ext cx="12191999" cy="347472"/>
-          </a:xfrm>
-          <a:prstGeom prst="rect">
-            <a:avLst/>
-          </a:prstGeom>
-          <a:solidFill>
-            <a:srgbClr val="0F2C59"/>
-          </a:solidFill>
-          <a:ln>
-            <a:noFill/>
-          </a:ln>
-        </p:spPr>
-        <p:style>
-          <a:lnRef idx="1">
-            <a:schemeClr val="accent1"/>
-          </a:lnRef>
-          <a:fillRef idx="3">
-            <a:schemeClr val="accent1"/>
-          </a:fillRef>
-          <a:effectRef idx="2">
-            <a:schemeClr val="accent1"/>
-          </a:effectRef>
-          <a:fontRef idx="minor">
-            <a:schemeClr val="lt1"/>
-          </a:fontRef>
-        </p:style>
-        <p:txBody>
-          <a:bodyPr rtlCol="0" anchor="ctr"/>
-          <a:lstStyle/>
-          <a:p>
-            <a:pPr algn="ctr"/>
-          </a:p>
-        </p:txBody>
-      </p:sp>
-      <p:sp>
-        <p:nvSpPr>
-          <p:cNvPr id="5" name="TextBox 4"/>
-          <p:cNvSpPr txBox="1"/>
-          <p:nvPr/>
-        </p:nvSpPr>
-        <p:spPr>
-          <a:xfrm>
-            <a:off x="457200" y="6528816"/>
-            <a:ext cx="9144000" cy="292608"/>
-          </a:xfrm>
-          <a:prstGeom prst="rect">
-            <a:avLst/>
-          </a:prstGeom>
-          <a:noFill/>
-        </p:spPr>
-        <p:txBody>
-          <a:bodyPr wrap="square" anchor="ctr">
-            <a:spAutoFit/>
-          </a:bodyPr>
-          <a:lstStyle/>
-          <a:p>
-            <a:pPr algn="l"/>
-            <a:r>
-              <a:rPr sz="1100" b="0">
-                <a:solidFill>
-                  <a:srgbClr val="FFFFFF"/>
-                </a:solidFill>
-                <a:latin typeface="Calibri"/>
-              </a:rPr>
-              <a:t>Curso de Inteligencia Artificial  ·  Razonamiento probabilístico</a:t>
-            </a:r>
-          </a:p>
-        </p:txBody>
-      </p:sp>
-      <p:sp>
-        <p:nvSpPr>
-          <p:cNvPr id="6" name="TextBox 5"/>
-          <p:cNvSpPr txBox="1"/>
-          <p:nvPr/>
-        </p:nvSpPr>
-        <p:spPr>
-          <a:xfrm>
-            <a:off x="10378440" y="6528816"/>
-            <a:ext cx="1371600" cy="292608"/>
-          </a:xfrm>
-          <a:prstGeom prst="rect">
-            <a:avLst/>
-          </a:prstGeom>
-          <a:noFill/>
-        </p:spPr>
-        <p:txBody>
-          <a:bodyPr wrap="square" anchor="ctr">
-            <a:spAutoFit/>
-          </a:bodyPr>
-          <a:lstStyle/>
-          <a:p>
-            <a:pPr algn="r"/>
-            <a:r>
-              <a:rPr sz="1100" b="0">
-                <a:solidFill>
-                  <a:srgbClr val="FFFFFF"/>
-                </a:solidFill>
-                <a:latin typeface="Calibri"/>
-              </a:rPr>
-              <a:t>14 / 15</a:t>
-            </a:r>
-          </a:p>
-        </p:txBody>
-      </p:sp>
-      <p:sp>
-        <p:nvSpPr>
-          <p:cNvPr id="7" name="TextBox 6"/>
-          <p:cNvSpPr txBox="1"/>
-          <p:nvPr/>
-        </p:nvSpPr>
-        <p:spPr>
-          <a:xfrm>
-            <a:off x="502920" y="256032"/>
-            <a:ext cx="11155680" cy="502920"/>
-          </a:xfrm>
-          <a:prstGeom prst="rect">
-            <a:avLst/>
-          </a:prstGeom>
-          <a:noFill/>
-        </p:spPr>
-        <p:txBody>
-          <a:bodyPr wrap="square" anchor="ctr">
-            <a:spAutoFit/>
-          </a:bodyPr>
-          <a:lstStyle/>
-          <a:p>
-            <a:pPr algn="l"/>
-            <a:r>
-              <a:rPr sz="2800" b="1">
-                <a:solidFill>
-                  <a:srgbClr val="0F2C59"/>
-                </a:solidFill>
-                <a:latin typeface="Calibri"/>
-              </a:rPr>
-              <a:t>Para llevar</a:t>
-            </a:r>
-          </a:p>
-        </p:txBody>
-      </p:sp>
-      <p:sp>
-        <p:nvSpPr>
-          <p:cNvPr id="8" name="Rectangle 7"/>
-          <p:cNvSpPr/>
-          <p:nvPr/>
-        </p:nvSpPr>
-        <p:spPr>
-          <a:xfrm>
-            <a:off x="502920" y="804672"/>
-            <a:ext cx="1280160" cy="54864"/>
-          </a:xfrm>
-          <a:prstGeom prst="rect">
-            <a:avLst/>
-          </a:prstGeom>
-          <a:solidFill>
-            <a:srgbClr val="E8B93A"/>
-          </a:solidFill>
-          <a:ln>
-            <a:noFill/>
-          </a:ln>
-        </p:spPr>
-        <p:style>
-          <a:lnRef idx="1">
-            <a:schemeClr val="accent1"/>
-          </a:lnRef>
-          <a:fillRef idx="3">
-            <a:schemeClr val="accent1"/>
-          </a:fillRef>
-          <a:effectRef idx="2">
-            <a:schemeClr val="accent1"/>
-          </a:effectRef>
-          <a:fontRef idx="minor">
-            <a:schemeClr val="lt1"/>
-          </a:fontRef>
-        </p:style>
-        <p:txBody>
-          <a:bodyPr rtlCol="0" anchor="ctr"/>
-          <a:lstStyle/>
-          <a:p>
-            <a:pPr algn="ctr"/>
-          </a:p>
-        </p:txBody>
-      </p:sp>
-      <p:sp>
-        <p:nvSpPr>
-          <p:cNvPr id="9" name="Rounded Rectangle 8"/>
-          <p:cNvSpPr/>
-          <p:nvPr/>
-        </p:nvSpPr>
-        <p:spPr>
-          <a:xfrm>
-            <a:off x="502920" y="1417320"/>
-            <a:ext cx="11155680" cy="4617720"/>
-          </a:xfrm>
-          <a:prstGeom prst="roundRect">
-            <a:avLst>
-              <a:gd name="adj" fmla="val 8000"/>
-            </a:avLst>
-          </a:prstGeom>
-          <a:solidFill>
-            <a:srgbClr val="F6F8FB"/>
-          </a:solidFill>
-          <a:ln w="15875">
-            <a:solidFill>
-              <a:srgbClr val="D5DEE8"/>
-            </a:solidFill>
-          </a:ln>
-        </p:spPr>
-        <p:style>
-          <a:lnRef idx="1">
-            <a:schemeClr val="accent1"/>
-          </a:lnRef>
-          <a:fillRef idx="3">
-            <a:schemeClr val="accent1"/>
-          </a:fillRef>
-          <a:effectRef idx="2">
-            <a:schemeClr val="accent1"/>
-          </a:effectRef>
-          <a:fontRef idx="minor">
-            <a:schemeClr val="lt1"/>
-          </a:fontRef>
-        </p:style>
-        <p:txBody>
-          <a:bodyPr rtlCol="0" anchor="ctr"/>
-          <a:lstStyle/>
-          <a:p>
-            <a:pPr algn="ctr"/>
+            <a:endParaRPr/>
           </a:p>
         </p:txBody>
       </p:sp>
@@ -6779,7 +6287,7 @@
         <p:spPr>
           <a:xfrm>
             <a:off x="822960" y="1691640"/>
-            <a:ext cx="10515600" cy="4160520"/>
+            <a:ext cx="10515600" cy="4247317"/>
           </a:xfrm>
           <a:prstGeom prst="rect">
             <a:avLst/>
@@ -6798,13 +6306,85 @@
               </a:spcAft>
             </a:pPr>
             <a:r>
-              <a:rPr sz="1800" b="0">
+              <a:rPr sz="1800" b="0" dirty="0">
                 <a:solidFill>
                   <a:srgbClr val="2C3E50"/>
                 </a:solidFill>
                 <a:latin typeface="Calibri"/>
               </a:rPr>
-              <a:t>•  Una red bayesiana = DAG + CPT. Factoriza la conjunta: Π P(Xi | padres).</a:t>
+              <a:t>•  Una red </a:t>
+            </a:r>
+            <a:r>
+              <a:rPr sz="1800" b="0" dirty="0" err="1">
+                <a:solidFill>
+                  <a:srgbClr val="2C3E50"/>
+                </a:solidFill>
+                <a:latin typeface="Calibri"/>
+              </a:rPr>
+              <a:t>bayesiana</a:t>
+            </a:r>
+            <a:r>
+              <a:rPr sz="1800" b="0" dirty="0">
+                <a:solidFill>
+                  <a:srgbClr val="2C3E50"/>
+                </a:solidFill>
+                <a:latin typeface="Calibri"/>
+              </a:rPr>
+              <a:t> = DAG + CPT. </a:t>
+            </a:r>
+            <a:r>
+              <a:rPr sz="1800" b="0" dirty="0" err="1">
+                <a:solidFill>
+                  <a:srgbClr val="2C3E50"/>
+                </a:solidFill>
+                <a:latin typeface="Calibri"/>
+              </a:rPr>
+              <a:t>Factoriza</a:t>
+            </a:r>
+            <a:r>
+              <a:rPr sz="1800" b="0" dirty="0">
+                <a:solidFill>
+                  <a:srgbClr val="2C3E50"/>
+                </a:solidFill>
+                <a:latin typeface="Calibri"/>
+              </a:rPr>
+              <a:t> la </a:t>
+            </a:r>
+            <a:r>
+              <a:rPr sz="1800" b="0" dirty="0" err="1">
+                <a:solidFill>
+                  <a:srgbClr val="2C3E50"/>
+                </a:solidFill>
+                <a:latin typeface="Calibri"/>
+              </a:rPr>
+              <a:t>conjunta</a:t>
+            </a:r>
+            <a:r>
+              <a:rPr sz="1800" b="0" dirty="0">
+                <a:solidFill>
+                  <a:srgbClr val="2C3E50"/>
+                </a:solidFill>
+                <a:latin typeface="Calibri"/>
+              </a:rPr>
+              <a:t>: </a:t>
+            </a:r>
+            <a:r>
+              <a:rPr sz="1800" b="0" dirty="0" err="1">
+                <a:solidFill>
+                  <a:srgbClr val="2C3E50"/>
+                </a:solidFill>
+                <a:latin typeface="Calibri"/>
+              </a:rPr>
+              <a:t>Π</a:t>
+            </a:r>
+            <a:r>
+              <a:rPr sz="1800" b="0" dirty="0">
+                <a:solidFill>
+                  <a:srgbClr val="2C3E50"/>
+                </a:solidFill>
+                <a:latin typeface="Calibri"/>
+              </a:rPr>
+              <a:t> P(Xi | padres).</a:t>
             </a:r>
           </a:p>
           <a:p>
@@ -6814,13 +6394,121 @@
               </a:spcAft>
             </a:pPr>
             <a:r>
-              <a:rPr sz="1800" b="0">
+              <a:rPr sz="1800" b="0" dirty="0">
                 <a:solidFill>
                   <a:srgbClr val="2C3E50"/>
                 </a:solidFill>
                 <a:latin typeface="Calibri"/>
               </a:rPr>
-              <a:t>•  Ahorra parámetros cuando cada variable tiene pocos padres.</a:t>
+              <a:t>•  </a:t>
+            </a:r>
+            <a:r>
+              <a:rPr sz="1800" b="0" dirty="0" err="1">
+                <a:solidFill>
+                  <a:srgbClr val="2C3E50"/>
+                </a:solidFill>
+                <a:latin typeface="Calibri"/>
+              </a:rPr>
+              <a:t>Ahorra</a:t>
+            </a:r>
+            <a:r>
+              <a:rPr sz="1800" b="0" dirty="0">
+                <a:solidFill>
+                  <a:srgbClr val="2C3E50"/>
+                </a:solidFill>
+                <a:latin typeface="Calibri"/>
+              </a:rPr>
+              <a:t> </a:t>
+            </a:r>
+            <a:r>
+              <a:rPr sz="1800" b="0" dirty="0" err="1">
+                <a:solidFill>
+                  <a:srgbClr val="2C3E50"/>
+                </a:solidFill>
+                <a:latin typeface="Calibri"/>
+              </a:rPr>
+              <a:t>parámetros</a:t>
+            </a:r>
+            <a:r>
+              <a:rPr sz="1800" b="0" dirty="0">
+                <a:solidFill>
+                  <a:srgbClr val="2C3E50"/>
+                </a:solidFill>
+                <a:latin typeface="Calibri"/>
+              </a:rPr>
+              <a:t> </a:t>
+            </a:r>
+            <a:r>
+              <a:rPr sz="1800" b="0" dirty="0" err="1">
+                <a:solidFill>
+                  <a:srgbClr val="2C3E50"/>
+                </a:solidFill>
+                <a:latin typeface="Calibri"/>
+              </a:rPr>
+              <a:t>cuando</a:t>
+            </a:r>
+            <a:r>
+              <a:rPr sz="1800" b="0" dirty="0">
+                <a:solidFill>
+                  <a:srgbClr val="2C3E50"/>
+                </a:solidFill>
+                <a:latin typeface="Calibri"/>
+              </a:rPr>
+              <a:t> </a:t>
+            </a:r>
+            <a:r>
+              <a:rPr sz="1800" b="0" dirty="0" err="1">
+                <a:solidFill>
+                  <a:srgbClr val="2C3E50"/>
+                </a:solidFill>
+                <a:latin typeface="Calibri"/>
+              </a:rPr>
+              <a:t>cada</a:t>
+            </a:r>
+            <a:r>
+              <a:rPr sz="1800" b="0" dirty="0">
+                <a:solidFill>
+                  <a:srgbClr val="2C3E50"/>
+                </a:solidFill>
+                <a:latin typeface="Calibri"/>
+              </a:rPr>
+              <a:t> variable </a:t>
+            </a:r>
+            <a:r>
+              <a:rPr sz="1800" b="0" dirty="0" err="1">
+                <a:solidFill>
+                  <a:srgbClr val="2C3E50"/>
+                </a:solidFill>
+                <a:latin typeface="Calibri"/>
+              </a:rPr>
+              <a:t>tiene</a:t>
+            </a:r>
+            <a:r>
+              <a:rPr sz="1800" b="0" dirty="0">
+                <a:solidFill>
+                  <a:srgbClr val="2C3E50"/>
+                </a:solidFill>
+                <a:latin typeface="Calibri"/>
+              </a:rPr>
+              <a:t> </a:t>
+            </a:r>
+            <a:r>
+              <a:rPr sz="1800" b="0" dirty="0" err="1">
+                <a:solidFill>
+                  <a:srgbClr val="2C3E50"/>
+                </a:solidFill>
+                <a:latin typeface="Calibri"/>
+              </a:rPr>
+              <a:t>pocos</a:t>
+            </a:r>
+            <a:r>
+              <a:rPr sz="1800" b="0" dirty="0">
+                <a:solidFill>
+                  <a:srgbClr val="2C3E50"/>
+                </a:solidFill>
+                <a:latin typeface="Calibri"/>
+              </a:rPr>
+              <a:t> padres.</a:t>
             </a:r>
           </a:p>
           <a:p>
@@ -6830,13 +6518,103 @@
               </a:spcAft>
             </a:pPr>
             <a:r>
-              <a:rPr sz="1800" b="0">
+              <a:rPr sz="1800" b="0" dirty="0">
                 <a:solidFill>
                   <a:srgbClr val="2C3E50"/>
                 </a:solidFill>
                 <a:latin typeface="Calibri"/>
               </a:rPr>
-              <a:t>•  En el ejemplo, pasto mojado sube P(lluvia) de 0.20 a ≈ 0.65.</a:t>
+              <a:t>•  En el </a:t>
+            </a:r>
+            <a:r>
+              <a:rPr sz="1800" b="0" dirty="0" err="1">
+                <a:solidFill>
+                  <a:srgbClr val="2C3E50"/>
+                </a:solidFill>
+                <a:latin typeface="Calibri"/>
+              </a:rPr>
+              <a:t>ejemplo</a:t>
+            </a:r>
+            <a:r>
+              <a:rPr sz="1800" b="0" dirty="0">
+                <a:solidFill>
+                  <a:srgbClr val="2C3E50"/>
+                </a:solidFill>
+                <a:latin typeface="Calibri"/>
+              </a:rPr>
+              <a:t>, </a:t>
+            </a:r>
+            <a:r>
+              <a:rPr sz="1800" b="0" dirty="0" err="1">
+                <a:solidFill>
+                  <a:srgbClr val="2C3E50"/>
+                </a:solidFill>
+                <a:latin typeface="Calibri"/>
+              </a:rPr>
+              <a:t>pasto</a:t>
+            </a:r>
+            <a:r>
+              <a:rPr sz="1800" b="0" dirty="0">
+                <a:solidFill>
+                  <a:srgbClr val="2C3E50"/>
+                </a:solidFill>
+                <a:latin typeface="Calibri"/>
+              </a:rPr>
+              <a:t> </a:t>
+            </a:r>
+            <a:r>
+              <a:rPr sz="1800" b="0" dirty="0" err="1">
+                <a:solidFill>
+                  <a:srgbClr val="2C3E50"/>
+                </a:solidFill>
+                <a:latin typeface="Calibri"/>
+              </a:rPr>
+              <a:t>mojado</a:t>
+            </a:r>
+            <a:r>
+              <a:rPr sz="1800" b="0" dirty="0">
+                <a:solidFill>
+                  <a:srgbClr val="2C3E50"/>
+                </a:solidFill>
+                <a:latin typeface="Calibri"/>
+              </a:rPr>
+              <a:t> </a:t>
+            </a:r>
+            <a:r>
+              <a:rPr sz="1800" b="0" dirty="0" err="1">
+                <a:solidFill>
+                  <a:srgbClr val="2C3E50"/>
+                </a:solidFill>
+                <a:latin typeface="Calibri"/>
+              </a:rPr>
+              <a:t>sube</a:t>
+            </a:r>
+            <a:r>
+              <a:rPr sz="1800" b="0" dirty="0">
+                <a:solidFill>
+                  <a:srgbClr val="2C3E50"/>
+                </a:solidFill>
+                <a:latin typeface="Calibri"/>
+              </a:rPr>
+              <a:t> P(</a:t>
+            </a:r>
+            <a:r>
+              <a:rPr sz="1800" b="0" dirty="0" err="1">
+                <a:solidFill>
+                  <a:srgbClr val="2C3E50"/>
+                </a:solidFill>
+                <a:latin typeface="Calibri"/>
+              </a:rPr>
+              <a:t>lluvia</a:t>
+            </a:r>
+            <a:r>
+              <a:rPr sz="1800" b="0" dirty="0">
+                <a:solidFill>
+                  <a:srgbClr val="2C3E50"/>
+                </a:solidFill>
+                <a:latin typeface="Calibri"/>
+              </a:rPr>
+              <a:t>) de 0.20 a ≈ 0.65.</a:t>
             </a:r>
           </a:p>
           <a:p>
@@ -6846,13 +6624,67 @@
               </a:spcAft>
             </a:pPr>
             <a:r>
-              <a:rPr sz="1800" b="0">
+              <a:rPr sz="1800" b="0" dirty="0">
                 <a:solidFill>
                   <a:srgbClr val="2C3E50"/>
                 </a:solidFill>
                 <a:latin typeface="Calibri"/>
               </a:rPr>
-              <a:t>•  Si también ves el aspersor, P(lluvia) baja a ≈ 0.24: explaining away.</a:t>
+              <a:t>•  Si también </a:t>
+            </a:r>
+            <a:r>
+              <a:rPr sz="1800" b="0" dirty="0" err="1">
+                <a:solidFill>
+                  <a:srgbClr val="2C3E50"/>
+                </a:solidFill>
+                <a:latin typeface="Calibri"/>
+              </a:rPr>
+              <a:t>ves</a:t>
+            </a:r>
+            <a:r>
+              <a:rPr sz="1800" b="0" dirty="0">
+                <a:solidFill>
+                  <a:srgbClr val="2C3E50"/>
+                </a:solidFill>
+                <a:latin typeface="Calibri"/>
+              </a:rPr>
+              <a:t> el </a:t>
+            </a:r>
+            <a:r>
+              <a:rPr sz="1800" b="0" dirty="0" err="1">
+                <a:solidFill>
+                  <a:srgbClr val="2C3E50"/>
+                </a:solidFill>
+                <a:latin typeface="Calibri"/>
+              </a:rPr>
+              <a:t>aspersor</a:t>
+            </a:r>
+            <a:r>
+              <a:rPr sz="1800" b="0" dirty="0">
+                <a:solidFill>
+                  <a:srgbClr val="2C3E50"/>
+                </a:solidFill>
+                <a:latin typeface="Calibri"/>
+              </a:rPr>
+              <a:t>, P(</a:t>
+            </a:r>
+            <a:r>
+              <a:rPr sz="1800" b="0" dirty="0" err="1">
+                <a:solidFill>
+                  <a:srgbClr val="2C3E50"/>
+                </a:solidFill>
+                <a:latin typeface="Calibri"/>
+              </a:rPr>
+              <a:t>lluvia</a:t>
+            </a:r>
+            <a:r>
+              <a:rPr sz="1800" b="0" dirty="0">
+                <a:solidFill>
+                  <a:srgbClr val="2C3E50"/>
+                </a:solidFill>
+                <a:latin typeface="Calibri"/>
+              </a:rPr>
+              <a:t>) baja a ≈ 0.24: explaining away.</a:t>
             </a:r>
           </a:p>
           <a:p>
@@ -6862,917 +6694,209 @@
               </a:spcAft>
             </a:pPr>
             <a:r>
-              <a:rPr sz="1800" b="0">
+              <a:rPr sz="1800" b="0" dirty="0">
                 <a:solidFill>
                   <a:srgbClr val="2C3E50"/>
                 </a:solidFill>
                 <a:latin typeface="Calibri"/>
               </a:rPr>
-              <a:t>•  Inferir es fijar evidencia, sumar ocultas y normalizar.</a:t>
-            </a:r>
-          </a:p>
-        </p:txBody>
-      </p:sp>
-    </p:spTree>
-  </p:cSld>
-  <p:clrMapOvr>
-    <a:masterClrMapping/>
-  </p:clrMapOvr>
-</p:sld>
-</file>
-
-<file path=ppt/slides/slide15.xml><?xml version="1.0" encoding="utf-8"?>
-<p:sld xmlns:a="http://schemas.openxmlformats.org/drawingml/2006/main" xmlns:p="http://schemas.openxmlformats.org/presentationml/2006/main" xmlns:r="http://schemas.openxmlformats.org/officeDocument/2006/relationships">
-  <p:cSld>
-    <p:spTree>
-      <p:nvGrpSpPr>
-        <p:cNvPr id="1" name=""/>
-        <p:cNvGrpSpPr/>
-        <p:nvPr/>
-      </p:nvGrpSpPr>
-      <p:grpSpPr/>
-      <p:sp>
-        <p:nvSpPr>
-          <p:cNvPr id="2" name="Rectangle 1"/>
-          <p:cNvSpPr/>
-          <p:nvPr/>
-        </p:nvSpPr>
-        <p:spPr>
-          <a:xfrm>
-            <a:off x="0" y="0"/>
-            <a:ext cx="12191999" cy="6858000"/>
-          </a:xfrm>
-          <a:prstGeom prst="rect">
-            <a:avLst/>
-          </a:prstGeom>
-          <a:solidFill>
-            <a:srgbClr val="FFFFFF"/>
-          </a:solidFill>
-          <a:ln>
-            <a:noFill/>
-          </a:ln>
-        </p:spPr>
-        <p:style>
-          <a:lnRef idx="1">
-            <a:schemeClr val="accent1"/>
-          </a:lnRef>
-          <a:fillRef idx="3">
-            <a:schemeClr val="accent1"/>
-          </a:fillRef>
-          <a:effectRef idx="2">
-            <a:schemeClr val="accent1"/>
-          </a:effectRef>
-          <a:fontRef idx="minor">
-            <a:schemeClr val="lt1"/>
-          </a:fontRef>
-        </p:style>
-        <p:txBody>
-          <a:bodyPr rtlCol="0" anchor="ctr"/>
-          <a:lstStyle/>
-          <a:p>
-            <a:pPr algn="ctr"/>
-          </a:p>
-        </p:txBody>
-      </p:sp>
-      <p:sp>
-        <p:nvSpPr>
-          <p:cNvPr id="3" name="Rectangle 2"/>
-          <p:cNvSpPr/>
-          <p:nvPr/>
-        </p:nvSpPr>
-        <p:spPr>
-          <a:xfrm>
-            <a:off x="0" y="0"/>
-            <a:ext cx="109728" cy="6858000"/>
-          </a:xfrm>
-          <a:prstGeom prst="rect">
-            <a:avLst/>
-          </a:prstGeom>
-          <a:solidFill>
-            <a:srgbClr val="E8B93A"/>
-          </a:solidFill>
-          <a:ln>
-            <a:noFill/>
-          </a:ln>
-        </p:spPr>
-        <p:style>
-          <a:lnRef idx="1">
-            <a:schemeClr val="accent1"/>
-          </a:lnRef>
-          <a:fillRef idx="3">
-            <a:schemeClr val="accent1"/>
-          </a:fillRef>
-          <a:effectRef idx="2">
-            <a:schemeClr val="accent1"/>
-          </a:effectRef>
-          <a:fontRef idx="minor">
-            <a:schemeClr val="lt1"/>
-          </a:fontRef>
-        </p:style>
-        <p:txBody>
-          <a:bodyPr rtlCol="0" anchor="ctr"/>
-          <a:lstStyle/>
-          <a:p>
-            <a:pPr algn="ctr"/>
-          </a:p>
-        </p:txBody>
-      </p:sp>
-      <p:sp>
-        <p:nvSpPr>
-          <p:cNvPr id="4" name="Rectangle 3"/>
-          <p:cNvSpPr/>
-          <p:nvPr/>
-        </p:nvSpPr>
-        <p:spPr>
-          <a:xfrm>
-            <a:off x="0" y="6510528"/>
-            <a:ext cx="12191999" cy="347472"/>
-          </a:xfrm>
-          <a:prstGeom prst="rect">
-            <a:avLst/>
-          </a:prstGeom>
-          <a:solidFill>
-            <a:srgbClr val="0F2C59"/>
-          </a:solidFill>
-          <a:ln>
-            <a:noFill/>
-          </a:ln>
-        </p:spPr>
-        <p:style>
-          <a:lnRef idx="1">
-            <a:schemeClr val="accent1"/>
-          </a:lnRef>
-          <a:fillRef idx="3">
-            <a:schemeClr val="accent1"/>
-          </a:fillRef>
-          <a:effectRef idx="2">
-            <a:schemeClr val="accent1"/>
-          </a:effectRef>
-          <a:fontRef idx="minor">
-            <a:schemeClr val="lt1"/>
-          </a:fontRef>
-        </p:style>
-        <p:txBody>
-          <a:bodyPr rtlCol="0" anchor="ctr"/>
-          <a:lstStyle/>
-          <a:p>
-            <a:pPr algn="ctr"/>
-          </a:p>
-        </p:txBody>
-      </p:sp>
-      <p:sp>
-        <p:nvSpPr>
-          <p:cNvPr id="5" name="TextBox 4"/>
-          <p:cNvSpPr txBox="1"/>
-          <p:nvPr/>
-        </p:nvSpPr>
-        <p:spPr>
-          <a:xfrm>
-            <a:off x="457200" y="6528816"/>
-            <a:ext cx="9144000" cy="292608"/>
-          </a:xfrm>
-          <a:prstGeom prst="rect">
-            <a:avLst/>
-          </a:prstGeom>
-          <a:noFill/>
-        </p:spPr>
-        <p:txBody>
-          <a:bodyPr wrap="square" anchor="ctr">
-            <a:spAutoFit/>
-          </a:bodyPr>
-          <a:lstStyle/>
-          <a:p>
-            <a:pPr algn="l"/>
-            <a:r>
-              <a:rPr sz="1100" b="0">
-                <a:solidFill>
-                  <a:srgbClr val="FFFFFF"/>
-                </a:solidFill>
-                <a:latin typeface="Calibri"/>
-              </a:rPr>
-              <a:t>Curso de Inteligencia Artificial  ·  Razonamiento probabilístico</a:t>
-            </a:r>
-          </a:p>
-        </p:txBody>
-      </p:sp>
-      <p:sp>
-        <p:nvSpPr>
-          <p:cNvPr id="6" name="TextBox 5"/>
-          <p:cNvSpPr txBox="1"/>
-          <p:nvPr/>
-        </p:nvSpPr>
-        <p:spPr>
-          <a:xfrm>
-            <a:off x="10378440" y="6528816"/>
-            <a:ext cx="1371600" cy="292608"/>
-          </a:xfrm>
-          <a:prstGeom prst="rect">
-            <a:avLst/>
-          </a:prstGeom>
-          <a:noFill/>
-        </p:spPr>
-        <p:txBody>
-          <a:bodyPr wrap="square" anchor="ctr">
-            <a:spAutoFit/>
-          </a:bodyPr>
-          <a:lstStyle/>
-          <a:p>
-            <a:pPr algn="r"/>
-            <a:r>
-              <a:rPr sz="1100" b="0">
-                <a:solidFill>
-                  <a:srgbClr val="FFFFFF"/>
-                </a:solidFill>
-                <a:latin typeface="Calibri"/>
-              </a:rPr>
-              <a:t>15 / 15</a:t>
-            </a:r>
-          </a:p>
-        </p:txBody>
-      </p:sp>
-      <p:sp>
-        <p:nvSpPr>
-          <p:cNvPr id="7" name="TextBox 6"/>
-          <p:cNvSpPr txBox="1"/>
-          <p:nvPr/>
-        </p:nvSpPr>
-        <p:spPr>
-          <a:xfrm>
-            <a:off x="502920" y="256032"/>
-            <a:ext cx="11155680" cy="502920"/>
-          </a:xfrm>
-          <a:prstGeom prst="rect">
-            <a:avLst/>
-          </a:prstGeom>
-          <a:noFill/>
-        </p:spPr>
-        <p:txBody>
-          <a:bodyPr wrap="square" anchor="ctr">
-            <a:spAutoFit/>
-          </a:bodyPr>
-          <a:lstStyle/>
-          <a:p>
-            <a:pPr algn="l"/>
-            <a:r>
-              <a:rPr sz="2800" b="1">
-                <a:solidFill>
-                  <a:srgbClr val="0F2C59"/>
-                </a:solidFill>
-                <a:latin typeface="Calibri"/>
-              </a:rPr>
-              <a:t>Para discutir</a:t>
-            </a:r>
-          </a:p>
-        </p:txBody>
-      </p:sp>
-      <p:sp>
-        <p:nvSpPr>
-          <p:cNvPr id="8" name="Rectangle 7"/>
-          <p:cNvSpPr/>
-          <p:nvPr/>
-        </p:nvSpPr>
-        <p:spPr>
-          <a:xfrm>
-            <a:off x="502920" y="804672"/>
-            <a:ext cx="1280160" cy="54864"/>
-          </a:xfrm>
-          <a:prstGeom prst="rect">
-            <a:avLst/>
-          </a:prstGeom>
-          <a:solidFill>
-            <a:srgbClr val="E8B93A"/>
-          </a:solidFill>
-          <a:ln>
-            <a:noFill/>
-          </a:ln>
-        </p:spPr>
-        <p:style>
-          <a:lnRef idx="1">
-            <a:schemeClr val="accent1"/>
-          </a:lnRef>
-          <a:fillRef idx="3">
-            <a:schemeClr val="accent1"/>
-          </a:fillRef>
-          <a:effectRef idx="2">
-            <a:schemeClr val="accent1"/>
-          </a:effectRef>
-          <a:fontRef idx="minor">
-            <a:schemeClr val="lt1"/>
-          </a:fontRef>
-        </p:style>
-        <p:txBody>
-          <a:bodyPr rtlCol="0" anchor="ctr"/>
-          <a:lstStyle/>
-          <a:p>
-            <a:pPr algn="ctr"/>
-          </a:p>
-        </p:txBody>
-      </p:sp>
-      <p:sp>
-        <p:nvSpPr>
-          <p:cNvPr id="9" name="Rounded Rectangle 8"/>
-          <p:cNvSpPr/>
-          <p:nvPr/>
-        </p:nvSpPr>
-        <p:spPr>
-          <a:xfrm>
-            <a:off x="502920" y="1417320"/>
-            <a:ext cx="5349240" cy="2148840"/>
-          </a:xfrm>
-          <a:prstGeom prst="roundRect">
-            <a:avLst>
-              <a:gd name="adj" fmla="val 8000"/>
-            </a:avLst>
-          </a:prstGeom>
-          <a:solidFill>
-            <a:srgbClr val="F6F8FB"/>
-          </a:solidFill>
-          <a:ln w="15875">
-            <a:solidFill>
-              <a:srgbClr val="D5DEE8"/>
-            </a:solidFill>
-          </a:ln>
-        </p:spPr>
-        <p:style>
-          <a:lnRef idx="1">
-            <a:schemeClr val="accent1"/>
-          </a:lnRef>
-          <a:fillRef idx="3">
-            <a:schemeClr val="accent1"/>
-          </a:fillRef>
-          <a:effectRef idx="2">
-            <a:schemeClr val="accent1"/>
-          </a:effectRef>
-          <a:fontRef idx="minor">
-            <a:schemeClr val="lt1"/>
-          </a:fontRef>
-        </p:style>
-        <p:txBody>
-          <a:bodyPr rtlCol="0" anchor="ctr"/>
-          <a:lstStyle/>
-          <a:p>
-            <a:pPr algn="ctr"/>
-          </a:p>
-        </p:txBody>
-      </p:sp>
-      <p:sp>
-        <p:nvSpPr>
-          <p:cNvPr id="10" name="TextBox 9"/>
-          <p:cNvSpPr txBox="1"/>
-          <p:nvPr/>
-        </p:nvSpPr>
-        <p:spPr>
-          <a:xfrm>
-            <a:off x="704088" y="1600200"/>
-            <a:ext cx="4946904" cy="329184"/>
-          </a:xfrm>
-          <a:prstGeom prst="rect">
-            <a:avLst/>
-          </a:prstGeom>
-          <a:noFill/>
-        </p:spPr>
-        <p:txBody>
-          <a:bodyPr wrap="square" anchor="t">
-            <a:spAutoFit/>
-          </a:bodyPr>
-          <a:lstStyle/>
-          <a:p>
-            <a:pPr algn="l"/>
-            <a:r>
-              <a:rPr sz="1600" b="1">
-                <a:solidFill>
-                  <a:srgbClr val="1B6CA8"/>
-                </a:solidFill>
-                <a:latin typeface="Calibri"/>
-              </a:rPr>
-              <a:t>01</a:t>
-            </a:r>
-          </a:p>
-        </p:txBody>
-      </p:sp>
-      <p:sp>
-        <p:nvSpPr>
-          <p:cNvPr id="11" name="TextBox 10"/>
-          <p:cNvSpPr txBox="1"/>
-          <p:nvPr/>
-        </p:nvSpPr>
-        <p:spPr>
-          <a:xfrm>
-            <a:off x="704088" y="1920240"/>
-            <a:ext cx="4946904" cy="640080"/>
-          </a:xfrm>
-          <a:prstGeom prst="rect">
-            <a:avLst/>
-          </a:prstGeom>
-          <a:noFill/>
-        </p:spPr>
-        <p:txBody>
-          <a:bodyPr wrap="square" anchor="t">
-            <a:spAutoFit/>
-          </a:bodyPr>
-          <a:lstStyle/>
-          <a:p>
-            <a:pPr algn="l"/>
-            <a:r>
-              <a:rPr sz="1800" b="1">
-                <a:solidFill>
-                  <a:srgbClr val="0F2C59"/>
-                </a:solidFill>
-                <a:latin typeface="Calibri"/>
-              </a:rPr>
-              <a:t>¿Qué arista falta?</a:t>
-            </a:r>
-          </a:p>
-        </p:txBody>
-      </p:sp>
-      <p:sp>
-        <p:nvSpPr>
-          <p:cNvPr id="12" name="TextBox 11"/>
-          <p:cNvSpPr txBox="1"/>
-          <p:nvPr/>
-        </p:nvSpPr>
-        <p:spPr>
-          <a:xfrm>
-            <a:off x="704088" y="2560320"/>
-            <a:ext cx="4946904" cy="822960"/>
-          </a:xfrm>
-          <a:prstGeom prst="rect">
-            <a:avLst/>
-          </a:prstGeom>
-          <a:noFill/>
-        </p:spPr>
-        <p:txBody>
-          <a:bodyPr wrap="square" anchor="t">
-            <a:spAutoFit/>
-          </a:bodyPr>
-          <a:lstStyle/>
-          <a:p>
-            <a:pPr algn="l"/>
-            <a:r>
-              <a:rPr sz="1400" b="0">
+              <a:t>•  </a:t>
+            </a:r>
+            <a:r>
+              <a:rPr sz="1800" b="0" dirty="0" err="1">
                 <a:solidFill>
                   <a:srgbClr val="2C3E50"/>
                 </a:solidFill>
                 <a:latin typeface="Calibri"/>
               </a:rPr>
-              <a:t>Si el cielo nublado causa lluvia y aspersor, ¿cómo cambia el grafo?</a:t>
-            </a:r>
-          </a:p>
-        </p:txBody>
-      </p:sp>
-      <p:sp>
-        <p:nvSpPr>
-          <p:cNvPr id="13" name="Rounded Rectangle 12"/>
-          <p:cNvSpPr/>
-          <p:nvPr/>
-        </p:nvSpPr>
-        <p:spPr>
-          <a:xfrm>
-            <a:off x="6355080" y="1417320"/>
-            <a:ext cx="5349240" cy="2148840"/>
-          </a:xfrm>
-          <a:prstGeom prst="roundRect">
-            <a:avLst>
-              <a:gd name="adj" fmla="val 8000"/>
-            </a:avLst>
-          </a:prstGeom>
-          <a:solidFill>
-            <a:srgbClr val="F6F8FB"/>
-          </a:solidFill>
-          <a:ln w="15875">
-            <a:solidFill>
-              <a:srgbClr val="D5DEE8"/>
-            </a:solidFill>
-          </a:ln>
-        </p:spPr>
-        <p:style>
-          <a:lnRef idx="1">
-            <a:schemeClr val="accent1"/>
-          </a:lnRef>
-          <a:fillRef idx="3">
-            <a:schemeClr val="accent1"/>
-          </a:fillRef>
-          <a:effectRef idx="2">
-            <a:schemeClr val="accent1"/>
-          </a:effectRef>
-          <a:fontRef idx="minor">
-            <a:schemeClr val="lt1"/>
-          </a:fontRef>
-        </p:style>
-        <p:txBody>
-          <a:bodyPr rtlCol="0" anchor="ctr"/>
-          <a:lstStyle/>
-          <a:p>
-            <a:pPr algn="ctr"/>
-          </a:p>
-        </p:txBody>
-      </p:sp>
-      <p:sp>
-        <p:nvSpPr>
-          <p:cNvPr id="14" name="TextBox 13"/>
-          <p:cNvSpPr txBox="1"/>
-          <p:nvPr/>
-        </p:nvSpPr>
-        <p:spPr>
-          <a:xfrm>
-            <a:off x="6556248" y="1600200"/>
-            <a:ext cx="4946904" cy="329184"/>
-          </a:xfrm>
-          <a:prstGeom prst="rect">
-            <a:avLst/>
-          </a:prstGeom>
-          <a:noFill/>
-        </p:spPr>
-        <p:txBody>
-          <a:bodyPr wrap="square" anchor="t">
-            <a:spAutoFit/>
-          </a:bodyPr>
-          <a:lstStyle/>
-          <a:p>
-            <a:pPr algn="l"/>
-            <a:r>
-              <a:rPr sz="1600" b="1">
-                <a:solidFill>
-                  <a:srgbClr val="1B6CA8"/>
-                </a:solidFill>
-                <a:latin typeface="Calibri"/>
-              </a:rPr>
-              <a:t>02</a:t>
-            </a:r>
-          </a:p>
-        </p:txBody>
-      </p:sp>
-      <p:sp>
-        <p:nvSpPr>
-          <p:cNvPr id="15" name="TextBox 14"/>
-          <p:cNvSpPr txBox="1"/>
-          <p:nvPr/>
-        </p:nvSpPr>
-        <p:spPr>
-          <a:xfrm>
-            <a:off x="6556248" y="1920240"/>
-            <a:ext cx="4946904" cy="640080"/>
-          </a:xfrm>
-          <a:prstGeom prst="rect">
-            <a:avLst/>
-          </a:prstGeom>
-          <a:noFill/>
-        </p:spPr>
-        <p:txBody>
-          <a:bodyPr wrap="square" anchor="t">
-            <a:spAutoFit/>
-          </a:bodyPr>
-          <a:lstStyle/>
-          <a:p>
-            <a:pPr algn="l"/>
-            <a:r>
-              <a:rPr sz="1800" b="1">
-                <a:solidFill>
-                  <a:srgbClr val="0F2C59"/>
-                </a:solidFill>
-                <a:latin typeface="Calibri"/>
-              </a:rPr>
-              <a:t>¿0.05 de ruido?</a:t>
-            </a:r>
-          </a:p>
-        </p:txBody>
-      </p:sp>
-      <p:sp>
-        <p:nvSpPr>
-          <p:cNvPr id="16" name="TextBox 15"/>
-          <p:cNvSpPr txBox="1"/>
-          <p:nvPr/>
-        </p:nvSpPr>
-        <p:spPr>
-          <a:xfrm>
-            <a:off x="6556248" y="2560320"/>
-            <a:ext cx="4946904" cy="822960"/>
-          </a:xfrm>
-          <a:prstGeom prst="rect">
-            <a:avLst/>
-          </a:prstGeom>
-          <a:noFill/>
-        </p:spPr>
-        <p:txBody>
-          <a:bodyPr wrap="square" anchor="t">
-            <a:spAutoFit/>
-          </a:bodyPr>
-          <a:lstStyle/>
-          <a:p>
-            <a:pPr algn="l"/>
-            <a:r>
-              <a:rPr sz="1400" b="0">
+              <a:t>Inferir</a:t>
+            </a:r>
+            <a:r>
+              <a:rPr sz="1800" b="0" dirty="0">
                 <a:solidFill>
                   <a:srgbClr val="2C3E50"/>
                 </a:solidFill>
                 <a:latin typeface="Calibri"/>
               </a:rPr>
-              <a:t>¿Qué pasa con P(L | P) si el pasto casi nunca se moja solo?</a:t>
-            </a:r>
-          </a:p>
-        </p:txBody>
-      </p:sp>
-      <p:sp>
-        <p:nvSpPr>
-          <p:cNvPr id="17" name="Rounded Rectangle 16"/>
-          <p:cNvSpPr/>
-          <p:nvPr/>
-        </p:nvSpPr>
-        <p:spPr>
-          <a:xfrm>
-            <a:off x="502920" y="3840480"/>
-            <a:ext cx="5349240" cy="2148840"/>
-          </a:xfrm>
-          <a:prstGeom prst="roundRect">
-            <a:avLst>
-              <a:gd name="adj" fmla="val 8000"/>
-            </a:avLst>
-          </a:prstGeom>
-          <a:solidFill>
-            <a:srgbClr val="F6F8FB"/>
-          </a:solidFill>
-          <a:ln w="15875">
-            <a:solidFill>
-              <a:srgbClr val="D5DEE8"/>
-            </a:solidFill>
-          </a:ln>
-        </p:spPr>
-        <p:style>
-          <a:lnRef idx="1">
-            <a:schemeClr val="accent1"/>
-          </a:lnRef>
-          <a:fillRef idx="3">
-            <a:schemeClr val="accent1"/>
-          </a:fillRef>
-          <a:effectRef idx="2">
-            <a:schemeClr val="accent1"/>
-          </a:effectRef>
-          <a:fontRef idx="minor">
-            <a:schemeClr val="lt1"/>
-          </a:fontRef>
-        </p:style>
-        <p:txBody>
-          <a:bodyPr rtlCol="0" anchor="ctr"/>
-          <a:lstStyle/>
-          <a:p>
-            <a:pPr algn="ctr"/>
-          </a:p>
-        </p:txBody>
-      </p:sp>
-      <p:sp>
-        <p:nvSpPr>
-          <p:cNvPr id="18" name="TextBox 17"/>
-          <p:cNvSpPr txBox="1"/>
-          <p:nvPr/>
-        </p:nvSpPr>
-        <p:spPr>
-          <a:xfrm>
-            <a:off x="704088" y="4023360"/>
-            <a:ext cx="4946904" cy="329184"/>
-          </a:xfrm>
-          <a:prstGeom prst="rect">
-            <a:avLst/>
-          </a:prstGeom>
-          <a:noFill/>
-        </p:spPr>
-        <p:txBody>
-          <a:bodyPr wrap="square" anchor="t">
-            <a:spAutoFit/>
-          </a:bodyPr>
-          <a:lstStyle/>
-          <a:p>
-            <a:pPr algn="l"/>
-            <a:r>
-              <a:rPr sz="1600" b="1">
-                <a:solidFill>
-                  <a:srgbClr val="1B6CA8"/>
-                </a:solidFill>
-                <a:latin typeface="Calibri"/>
-              </a:rPr>
-              <a:t>03</a:t>
-            </a:r>
-          </a:p>
-        </p:txBody>
-      </p:sp>
-      <p:sp>
-        <p:nvSpPr>
-          <p:cNvPr id="19" name="TextBox 18"/>
-          <p:cNvSpPr txBox="1"/>
-          <p:nvPr/>
-        </p:nvSpPr>
-        <p:spPr>
-          <a:xfrm>
-            <a:off x="704088" y="4343400"/>
-            <a:ext cx="4946904" cy="640080"/>
-          </a:xfrm>
-          <a:prstGeom prst="rect">
-            <a:avLst/>
-          </a:prstGeom>
-          <a:noFill/>
-        </p:spPr>
-        <p:txBody>
-          <a:bodyPr wrap="square" anchor="t">
-            <a:spAutoFit/>
-          </a:bodyPr>
-          <a:lstStyle/>
-          <a:p>
-            <a:pPr algn="l"/>
-            <a:r>
-              <a:rPr sz="1800" b="1">
-                <a:solidFill>
-                  <a:srgbClr val="0F2C59"/>
-                </a:solidFill>
-                <a:latin typeface="Calibri"/>
-              </a:rPr>
-              <a:t>¿Diagnóstico o predicción?</a:t>
-            </a:r>
-          </a:p>
-        </p:txBody>
-      </p:sp>
-      <p:sp>
-        <p:nvSpPr>
-          <p:cNvPr id="20" name="TextBox 19"/>
-          <p:cNvSpPr txBox="1"/>
-          <p:nvPr/>
-        </p:nvSpPr>
-        <p:spPr>
-          <a:xfrm>
-            <a:off x="704088" y="4983480"/>
-            <a:ext cx="4946904" cy="822960"/>
-          </a:xfrm>
-          <a:prstGeom prst="rect">
-            <a:avLst/>
-          </a:prstGeom>
-          <a:noFill/>
-        </p:spPr>
-        <p:txBody>
-          <a:bodyPr wrap="square" anchor="t">
-            <a:spAutoFit/>
-          </a:bodyPr>
-          <a:lstStyle/>
-          <a:p>
-            <a:pPr algn="l"/>
-            <a:r>
-              <a:rPr sz="1400" b="0">
+              <a:t> es </a:t>
+            </a:r>
+            <a:r>
+              <a:rPr sz="1800" b="0" dirty="0" err="1">
                 <a:solidFill>
                   <a:srgbClr val="2C3E50"/>
                 </a:solidFill>
                 <a:latin typeface="Calibri"/>
               </a:rPr>
-              <a:t>Un test médico: ¿P(enfermedad | síntoma) o al revés?</a:t>
-            </a:r>
-          </a:p>
-        </p:txBody>
-      </p:sp>
-      <p:sp>
-        <p:nvSpPr>
-          <p:cNvPr id="21" name="Rounded Rectangle 20"/>
-          <p:cNvSpPr/>
-          <p:nvPr/>
-        </p:nvSpPr>
-        <p:spPr>
-          <a:xfrm>
-            <a:off x="6355080" y="3840480"/>
-            <a:ext cx="5349240" cy="2148840"/>
-          </a:xfrm>
-          <a:prstGeom prst="roundRect">
-            <a:avLst>
-              <a:gd name="adj" fmla="val 8000"/>
-            </a:avLst>
-          </a:prstGeom>
-          <a:solidFill>
-            <a:srgbClr val="F6F8FB"/>
-          </a:solidFill>
-          <a:ln w="15875">
-            <a:solidFill>
-              <a:srgbClr val="D5DEE8"/>
-            </a:solidFill>
-          </a:ln>
-        </p:spPr>
-        <p:style>
-          <a:lnRef idx="1">
-            <a:schemeClr val="accent1"/>
-          </a:lnRef>
-          <a:fillRef idx="3">
-            <a:schemeClr val="accent1"/>
-          </a:fillRef>
-          <a:effectRef idx="2">
-            <a:schemeClr val="accent1"/>
-          </a:effectRef>
-          <a:fontRef idx="minor">
-            <a:schemeClr val="lt1"/>
-          </a:fontRef>
-        </p:style>
-        <p:txBody>
-          <a:bodyPr rtlCol="0" anchor="ctr"/>
-          <a:lstStyle/>
-          <a:p>
-            <a:pPr algn="ctr"/>
-          </a:p>
-        </p:txBody>
-      </p:sp>
-      <p:sp>
-        <p:nvSpPr>
-          <p:cNvPr id="22" name="TextBox 21"/>
-          <p:cNvSpPr txBox="1"/>
-          <p:nvPr/>
-        </p:nvSpPr>
-        <p:spPr>
-          <a:xfrm>
-            <a:off x="6556248" y="4023360"/>
-            <a:ext cx="4946904" cy="329184"/>
-          </a:xfrm>
-          <a:prstGeom prst="rect">
-            <a:avLst/>
-          </a:prstGeom>
-          <a:noFill/>
-        </p:spPr>
-        <p:txBody>
-          <a:bodyPr wrap="square" anchor="t">
-            <a:spAutoFit/>
-          </a:bodyPr>
-          <a:lstStyle/>
-          <a:p>
-            <a:pPr algn="l"/>
-            <a:r>
-              <a:rPr sz="1600" b="1">
-                <a:solidFill>
-                  <a:srgbClr val="1B6CA8"/>
-                </a:solidFill>
-                <a:latin typeface="Calibri"/>
-              </a:rPr>
-              <a:t>04</a:t>
-            </a:r>
-          </a:p>
-        </p:txBody>
-      </p:sp>
-      <p:sp>
-        <p:nvSpPr>
-          <p:cNvPr id="23" name="TextBox 22"/>
-          <p:cNvSpPr txBox="1"/>
-          <p:nvPr/>
-        </p:nvSpPr>
-        <p:spPr>
-          <a:xfrm>
-            <a:off x="6556248" y="4343400"/>
-            <a:ext cx="4946904" cy="640080"/>
-          </a:xfrm>
-          <a:prstGeom prst="rect">
-            <a:avLst/>
-          </a:prstGeom>
-          <a:noFill/>
-        </p:spPr>
-        <p:txBody>
-          <a:bodyPr wrap="square" anchor="t">
-            <a:spAutoFit/>
-          </a:bodyPr>
-          <a:lstStyle/>
-          <a:p>
-            <a:pPr algn="l"/>
-            <a:r>
-              <a:rPr sz="1800" b="1">
-                <a:solidFill>
-                  <a:srgbClr val="0F2C59"/>
-                </a:solidFill>
-                <a:latin typeface="Calibri"/>
-              </a:rPr>
-              <a:t>¿Y el Wumpus?</a:t>
-            </a:r>
-          </a:p>
-        </p:txBody>
-      </p:sp>
-      <p:sp>
-        <p:nvSpPr>
-          <p:cNvPr id="24" name="TextBox 23"/>
-          <p:cNvSpPr txBox="1"/>
-          <p:nvPr/>
-        </p:nvSpPr>
-        <p:spPr>
-          <a:xfrm>
-            <a:off x="6556248" y="4983480"/>
-            <a:ext cx="4946904" cy="822960"/>
-          </a:xfrm>
-          <a:prstGeom prst="rect">
-            <a:avLst/>
-          </a:prstGeom>
-          <a:noFill/>
-        </p:spPr>
-        <p:txBody>
-          <a:bodyPr wrap="square" anchor="t">
-            <a:spAutoFit/>
-          </a:bodyPr>
-          <a:lstStyle/>
-          <a:p>
-            <a:pPr algn="l"/>
-            <a:r>
-              <a:rPr sz="1400" b="0">
+              <a:t>fijar</a:t>
+            </a:r>
+            <a:r>
+              <a:rPr sz="1800" b="0" dirty="0">
                 <a:solidFill>
                   <a:srgbClr val="2C3E50"/>
                 </a:solidFill>
                 <a:latin typeface="Calibri"/>
               </a:rPr>
-              <a:t>¿Qué nodos pondrías para brisa y pozos en una casilla?</a:t>
-            </a:r>
+              <a:t> </a:t>
+            </a:r>
+            <a:r>
+              <a:rPr sz="1800" b="0" dirty="0" err="1">
+                <a:solidFill>
+                  <a:srgbClr val="2C3E50"/>
+                </a:solidFill>
+                <a:latin typeface="Calibri"/>
+              </a:rPr>
+              <a:t>evidencia</a:t>
+            </a:r>
+            <a:r>
+              <a:rPr sz="1800" b="0" dirty="0">
+                <a:solidFill>
+                  <a:srgbClr val="2C3E50"/>
+                </a:solidFill>
+                <a:latin typeface="Calibri"/>
+              </a:rPr>
+              <a:t>, </a:t>
+            </a:r>
+            <a:r>
+              <a:rPr sz="1800" b="0" dirty="0" err="1">
+                <a:solidFill>
+                  <a:srgbClr val="2C3E50"/>
+                </a:solidFill>
+                <a:latin typeface="Calibri"/>
+              </a:rPr>
+              <a:t>sumar</a:t>
+            </a:r>
+            <a:r>
+              <a:rPr sz="1800" b="0" dirty="0">
+                <a:solidFill>
+                  <a:srgbClr val="2C3E50"/>
+                </a:solidFill>
+                <a:latin typeface="Calibri"/>
+              </a:rPr>
+              <a:t> </a:t>
+            </a:r>
+            <a:r>
+              <a:rPr sz="1800" b="0" dirty="0" err="1">
+                <a:solidFill>
+                  <a:srgbClr val="2C3E50"/>
+                </a:solidFill>
+                <a:latin typeface="Calibri"/>
+              </a:rPr>
+              <a:t>ocultas</a:t>
+            </a:r>
+            <a:r>
+              <a:rPr sz="1800" b="0" dirty="0">
+                <a:solidFill>
+                  <a:srgbClr val="2C3E50"/>
+                </a:solidFill>
+                <a:latin typeface="Calibri"/>
+              </a:rPr>
+              <a:t> y </a:t>
+            </a:r>
+            <a:r>
+              <a:rPr sz="1800" b="0" dirty="0" err="1">
+                <a:solidFill>
+                  <a:srgbClr val="2C3E50"/>
+                </a:solidFill>
+                <a:latin typeface="Calibri"/>
+              </a:rPr>
+              <a:t>normalizar</a:t>
+            </a:r>
+            <a:r>
+              <a:rPr sz="1800" b="0" dirty="0">
+                <a:solidFill>
+                  <a:srgbClr val="2C3E50"/>
+                </a:solidFill>
+                <a:latin typeface="Calibri"/>
+              </a:rPr>
+              <a:t>.</a:t>
+            </a:r>
+            <a:endParaRPr lang="es-419" sz="1800" b="0" dirty="0">
+              <a:solidFill>
+                <a:srgbClr val="2C3E50"/>
+              </a:solidFill>
+              <a:latin typeface="Calibri"/>
+            </a:endParaRPr>
+          </a:p>
+          <a:p>
+            <a:pPr>
+              <a:spcAft>
+                <a:spcPts val="1200"/>
+              </a:spcAft>
+            </a:pPr>
+            <a:endParaRPr lang="es-MX" dirty="0">
+              <a:solidFill>
+                <a:srgbClr val="2C3E50"/>
+              </a:solidFill>
+              <a:latin typeface="Calibri"/>
+            </a:endParaRPr>
+          </a:p>
+          <a:p>
+            <a:pPr>
+              <a:spcAft>
+                <a:spcPts val="1200"/>
+              </a:spcAft>
+            </a:pPr>
+            <a:r>
+              <a:rPr lang="es-MX">
+                <a:solidFill>
+                  <a:srgbClr val="2C3E50"/>
+                </a:solidFill>
+                <a:latin typeface="Calibri"/>
+              </a:rPr>
+              <a:t>Liga a un sitio web con información sobre redes bayesianas: </a:t>
+            </a:r>
+            <a:endParaRPr lang="es-MX" dirty="0">
+              <a:solidFill>
+                <a:srgbClr val="2C3E50"/>
+              </a:solidFill>
+              <a:latin typeface="Calibri"/>
+            </a:endParaRPr>
+          </a:p>
+          <a:p>
+            <a:pPr>
+              <a:spcAft>
+                <a:spcPts val="1200"/>
+              </a:spcAft>
+            </a:pPr>
+            <a:r>
+              <a:rPr lang="es-MX" dirty="0">
+                <a:solidFill>
+                  <a:srgbClr val="2C3E50"/>
+                </a:solidFill>
+                <a:hlinkClick r:id="rId2"/>
+              </a:rPr>
+              <a:t>https://www.bayesserver.com/docs/introduction/bayesian-networks/</a:t>
+            </a:r>
+            <a:endParaRPr lang="es-MX" dirty="0">
+              <a:solidFill>
+                <a:srgbClr val="2C3E50"/>
+              </a:solidFill>
+            </a:endParaRPr>
+          </a:p>
+          <a:p>
+            <a:pPr>
+              <a:spcAft>
+                <a:spcPts val="1200"/>
+              </a:spcAft>
+            </a:pPr>
+            <a:endParaRPr lang="es-MX" dirty="0">
+              <a:solidFill>
+                <a:srgbClr val="2C3E50"/>
+              </a:solidFill>
+            </a:endParaRPr>
+          </a:p>
+          <a:p>
+            <a:pPr>
+              <a:spcAft>
+                <a:spcPts val="1200"/>
+              </a:spcAft>
+            </a:pPr>
+            <a:endParaRPr sz="1800" b="0" dirty="0">
+              <a:solidFill>
+                <a:srgbClr val="2C3E50"/>
+              </a:solidFill>
+              <a:latin typeface="Calibri"/>
+            </a:endParaRPr>
           </a:p>
         </p:txBody>
       </p:sp>
@@ -7785,7 +6909,7 @@
 </file>
 
 <file path=ppt/slides/slide2.xml><?xml version="1.0" encoding="utf-8"?>
-<p:sld xmlns:a="http://schemas.openxmlformats.org/drawingml/2006/main" xmlns:p="http://schemas.openxmlformats.org/presentationml/2006/main" xmlns:r="http://schemas.openxmlformats.org/officeDocument/2006/relationships">
+<p:sld xmlns:a="http://schemas.openxmlformats.org/drawingml/2006/main" xmlns:r="http://schemas.openxmlformats.org/officeDocument/2006/relationships" xmlns:p="http://schemas.openxmlformats.org/presentationml/2006/main">
   <p:cSld>
     <p:spTree>
       <p:nvGrpSpPr>
@@ -7793,7 +6917,14 @@
         <p:cNvGrpSpPr/>
         <p:nvPr/>
       </p:nvGrpSpPr>
-      <p:grpSpPr/>
+      <p:grpSpPr>
+        <a:xfrm>
+          <a:off x="0" y="0"/>
+          <a:ext cx="0" cy="0"/>
+          <a:chOff x="0" y="0"/>
+          <a:chExt cx="0" cy="0"/>
+        </a:xfrm>
+      </p:grpSpPr>
       <p:sp>
         <p:nvSpPr>
           <p:cNvPr id="2" name="Rectangle 1"/>
@@ -7834,6 +6965,7 @@
           <a:lstStyle/>
           <a:p>
             <a:pPr algn="ctr"/>
+            <a:endParaRPr/>
           </a:p>
         </p:txBody>
       </p:sp>
@@ -7877,6 +7009,7 @@
           <a:lstStyle/>
           <a:p>
             <a:pPr algn="ctr"/>
+            <a:endParaRPr/>
           </a:p>
         </p:txBody>
       </p:sp>
@@ -7920,6 +7053,7 @@
           <a:lstStyle/>
           <a:p>
             <a:pPr algn="ctr"/>
+            <a:endParaRPr/>
           </a:p>
         </p:txBody>
       </p:sp>
@@ -7966,8 +7100,8 @@
         </p:nvSpPr>
         <p:spPr>
           <a:xfrm>
-            <a:off x="10378440" y="6528816"/>
-            <a:ext cx="1371600" cy="292608"/>
+            <a:off x="10378440" y="6544315"/>
+            <a:ext cx="1371600" cy="261610"/>
           </a:xfrm>
           <a:prstGeom prst="rect">
             <a:avLst/>
@@ -7982,14 +7116,29 @@
           <a:p>
             <a:pPr algn="r"/>
             <a:r>
-              <a:rPr sz="1100" b="0">
+              <a:rPr sz="1100" b="0" dirty="0">
                 <a:solidFill>
                   <a:srgbClr val="FFFFFF"/>
                 </a:solidFill>
                 <a:latin typeface="Calibri"/>
               </a:rPr>
-              <a:t>2 / 15</a:t>
-            </a:r>
+              <a:t>2 / 1</a:t>
+            </a:r>
+            <a:r>
+              <a:rPr lang="es-419" sz="1100" b="0" dirty="0">
+                <a:solidFill>
+                  <a:srgbClr val="FFFFFF"/>
+                </a:solidFill>
+                <a:latin typeface="Calibri"/>
+              </a:rPr>
+              <a:t>3</a:t>
+            </a:r>
+            <a:endParaRPr sz="1100" b="0" dirty="0">
+              <a:solidFill>
+                <a:srgbClr val="FFFFFF"/>
+              </a:solidFill>
+              <a:latin typeface="Calibri"/>
+            </a:endParaRPr>
           </a:p>
         </p:txBody>
       </p:sp>
@@ -8068,6 +7217,7 @@
           <a:lstStyle/>
           <a:p>
             <a:pPr algn="ctr"/>
+            <a:endParaRPr/>
           </a:p>
         </p:txBody>
       </p:sp>
@@ -8115,6 +7265,7 @@
           <a:lstStyle/>
           <a:p>
             <a:pPr algn="ctr"/>
+            <a:endParaRPr/>
           </a:p>
         </p:txBody>
       </p:sp>
@@ -8267,6 +7418,7 @@
           <a:lstStyle/>
           <a:p>
             <a:pPr algn="ctr"/>
+            <a:endParaRPr/>
           </a:p>
         </p:txBody>
       </p:sp>
@@ -8419,6 +7571,7 @@
           <a:lstStyle/>
           <a:p>
             <a:pPr algn="ctr"/>
+            <a:endParaRPr/>
           </a:p>
         </p:txBody>
       </p:sp>
@@ -8571,6 +7724,7 @@
           <a:lstStyle/>
           <a:p>
             <a:pPr algn="ctr"/>
+            <a:endParaRPr/>
           </a:p>
         </p:txBody>
       </p:sp>
@@ -8688,7 +7842,7 @@
 </file>
 
 <file path=ppt/slides/slide3.xml><?xml version="1.0" encoding="utf-8"?>
-<p:sld xmlns:a="http://schemas.openxmlformats.org/drawingml/2006/main" xmlns:p="http://schemas.openxmlformats.org/presentationml/2006/main" xmlns:r="http://schemas.openxmlformats.org/officeDocument/2006/relationships">
+<p:sld xmlns:a="http://schemas.openxmlformats.org/drawingml/2006/main" xmlns:r="http://schemas.openxmlformats.org/officeDocument/2006/relationships" xmlns:p="http://schemas.openxmlformats.org/presentationml/2006/main">
   <p:cSld>
     <p:spTree>
       <p:nvGrpSpPr>
@@ -8696,7 +7850,14 @@
         <p:cNvGrpSpPr/>
         <p:nvPr/>
       </p:nvGrpSpPr>
-      <p:grpSpPr/>
+      <p:grpSpPr>
+        <a:xfrm>
+          <a:off x="0" y="0"/>
+          <a:ext cx="0" cy="0"/>
+          <a:chOff x="0" y="0"/>
+          <a:chExt cx="0" cy="0"/>
+        </a:xfrm>
+      </p:grpSpPr>
       <p:sp>
         <p:nvSpPr>
           <p:cNvPr id="2" name="Rectangle 1"/>
@@ -8737,6 +7898,7 @@
           <a:lstStyle/>
           <a:p>
             <a:pPr algn="ctr"/>
+            <a:endParaRPr/>
           </a:p>
         </p:txBody>
       </p:sp>
@@ -8780,6 +7942,7 @@
           <a:lstStyle/>
           <a:p>
             <a:pPr algn="ctr"/>
+            <a:endParaRPr/>
           </a:p>
         </p:txBody>
       </p:sp>
@@ -8823,6 +7986,7 @@
           <a:lstStyle/>
           <a:p>
             <a:pPr algn="ctr"/>
+            <a:endParaRPr/>
           </a:p>
         </p:txBody>
       </p:sp>
@@ -8869,8 +8033,8 @@
         </p:nvSpPr>
         <p:spPr>
           <a:xfrm>
-            <a:off x="10378440" y="6528816"/>
-            <a:ext cx="1371600" cy="292608"/>
+            <a:off x="10378440" y="6544315"/>
+            <a:ext cx="1371600" cy="261610"/>
           </a:xfrm>
           <a:prstGeom prst="rect">
             <a:avLst/>
@@ -8885,14 +8049,29 @@
           <a:p>
             <a:pPr algn="r"/>
             <a:r>
-              <a:rPr sz="1100" b="0">
+              <a:rPr sz="1100" b="0" dirty="0">
                 <a:solidFill>
                   <a:srgbClr val="FFFFFF"/>
                 </a:solidFill>
                 <a:latin typeface="Calibri"/>
               </a:rPr>
-              <a:t>3 / 15</a:t>
-            </a:r>
+              <a:t>3 / 1</a:t>
+            </a:r>
+            <a:r>
+              <a:rPr lang="es-419" sz="1100" b="0" dirty="0">
+                <a:solidFill>
+                  <a:srgbClr val="FFFFFF"/>
+                </a:solidFill>
+                <a:latin typeface="Calibri"/>
+              </a:rPr>
+              <a:t>3</a:t>
+            </a:r>
+            <a:endParaRPr sz="1100" b="0" dirty="0">
+              <a:solidFill>
+                <a:srgbClr val="FFFFFF"/>
+              </a:solidFill>
+              <a:latin typeface="Calibri"/>
+            </a:endParaRPr>
           </a:p>
         </p:txBody>
       </p:sp>
@@ -8971,6 +8150,7 @@
           <a:lstStyle/>
           <a:p>
             <a:pPr algn="ctr"/>
+            <a:endParaRPr/>
           </a:p>
         </p:txBody>
       </p:sp>
@@ -9053,6 +8233,7 @@
           <a:lstStyle/>
           <a:p>
             <a:pPr algn="ctr"/>
+            <a:endParaRPr/>
           </a:p>
         </p:txBody>
       </p:sp>
@@ -9168,7 +8349,7 @@
 </file>
 
 <file path=ppt/slides/slide4.xml><?xml version="1.0" encoding="utf-8"?>
-<p:sld xmlns:a="http://schemas.openxmlformats.org/drawingml/2006/main" xmlns:p="http://schemas.openxmlformats.org/presentationml/2006/main" xmlns:r="http://schemas.openxmlformats.org/officeDocument/2006/relationships">
+<p:sld xmlns:a="http://schemas.openxmlformats.org/drawingml/2006/main" xmlns:r="http://schemas.openxmlformats.org/officeDocument/2006/relationships" xmlns:p="http://schemas.openxmlformats.org/presentationml/2006/main">
   <p:cSld>
     <p:spTree>
       <p:nvGrpSpPr>
@@ -9176,7 +8357,14 @@
         <p:cNvGrpSpPr/>
         <p:nvPr/>
       </p:nvGrpSpPr>
-      <p:grpSpPr/>
+      <p:grpSpPr>
+        <a:xfrm>
+          <a:off x="0" y="0"/>
+          <a:ext cx="0" cy="0"/>
+          <a:chOff x="0" y="0"/>
+          <a:chExt cx="0" cy="0"/>
+        </a:xfrm>
+      </p:grpSpPr>
       <p:sp>
         <p:nvSpPr>
           <p:cNvPr id="2" name="Rectangle 1"/>
@@ -9217,6 +8405,7 @@
           <a:lstStyle/>
           <a:p>
             <a:pPr algn="ctr"/>
+            <a:endParaRPr/>
           </a:p>
         </p:txBody>
       </p:sp>
@@ -9260,6 +8449,7 @@
           <a:lstStyle/>
           <a:p>
             <a:pPr algn="ctr"/>
+            <a:endParaRPr/>
           </a:p>
         </p:txBody>
       </p:sp>
@@ -9303,6 +8493,7 @@
           <a:lstStyle/>
           <a:p>
             <a:pPr algn="ctr"/>
+            <a:endParaRPr/>
           </a:p>
         </p:txBody>
       </p:sp>
@@ -9349,8 +8540,8 @@
         </p:nvSpPr>
         <p:spPr>
           <a:xfrm>
-            <a:off x="10378440" y="6528816"/>
-            <a:ext cx="1371600" cy="292608"/>
+            <a:off x="10378440" y="6544315"/>
+            <a:ext cx="1371600" cy="261610"/>
           </a:xfrm>
           <a:prstGeom prst="rect">
             <a:avLst/>
@@ -9365,14 +8556,29 @@
           <a:p>
             <a:pPr algn="r"/>
             <a:r>
-              <a:rPr sz="1100" b="0">
+              <a:rPr sz="1100" b="0" dirty="0">
                 <a:solidFill>
                   <a:srgbClr val="FFFFFF"/>
                 </a:solidFill>
                 <a:latin typeface="Calibri"/>
               </a:rPr>
-              <a:t>4 / 15</a:t>
-            </a:r>
+              <a:t>4 / 1</a:t>
+            </a:r>
+            <a:r>
+              <a:rPr lang="es-419" sz="1100" b="0" dirty="0">
+                <a:solidFill>
+                  <a:srgbClr val="FFFFFF"/>
+                </a:solidFill>
+                <a:latin typeface="Calibri"/>
+              </a:rPr>
+              <a:t>3</a:t>
+            </a:r>
+            <a:endParaRPr sz="1100" b="0" dirty="0">
+              <a:solidFill>
+                <a:srgbClr val="FFFFFF"/>
+              </a:solidFill>
+              <a:latin typeface="Calibri"/>
+            </a:endParaRPr>
           </a:p>
         </p:txBody>
       </p:sp>
@@ -9451,6 +8657,7 @@
           <a:lstStyle/>
           <a:p>
             <a:pPr algn="ctr"/>
+            <a:endParaRPr/>
           </a:p>
         </p:txBody>
       </p:sp>
@@ -9533,6 +8740,7 @@
           <a:lstStyle/>
           <a:p>
             <a:pPr algn="ctr"/>
+            <a:endParaRPr/>
           </a:p>
         </p:txBody>
       </p:sp>
@@ -9702,6 +8910,7 @@
           <a:lstStyle/>
           <a:p>
             <a:pPr algn="ctr"/>
+            <a:endParaRPr/>
           </a:p>
         </p:txBody>
       </p:sp>
@@ -9836,7 +9045,7 @@
 </file>
 
 <file path=ppt/slides/slide5.xml><?xml version="1.0" encoding="utf-8"?>
-<p:sld xmlns:a="http://schemas.openxmlformats.org/drawingml/2006/main" xmlns:p="http://schemas.openxmlformats.org/presentationml/2006/main" xmlns:r="http://schemas.openxmlformats.org/officeDocument/2006/relationships">
+<p:sld xmlns:a="http://schemas.openxmlformats.org/drawingml/2006/main" xmlns:r="http://schemas.openxmlformats.org/officeDocument/2006/relationships" xmlns:p="http://schemas.openxmlformats.org/presentationml/2006/main">
   <p:cSld>
     <p:spTree>
       <p:nvGrpSpPr>
@@ -9844,7 +9053,14 @@
         <p:cNvGrpSpPr/>
         <p:nvPr/>
       </p:nvGrpSpPr>
-      <p:grpSpPr/>
+      <p:grpSpPr>
+        <a:xfrm>
+          <a:off x="0" y="0"/>
+          <a:ext cx="0" cy="0"/>
+          <a:chOff x="0" y="0"/>
+          <a:chExt cx="0" cy="0"/>
+        </a:xfrm>
+      </p:grpSpPr>
       <p:sp>
         <p:nvSpPr>
           <p:cNvPr id="2" name="Rectangle 1"/>
@@ -9885,6 +9101,7 @@
           <a:lstStyle/>
           <a:p>
             <a:pPr algn="ctr"/>
+            <a:endParaRPr/>
           </a:p>
         </p:txBody>
       </p:sp>
@@ -9928,6 +9145,7 @@
           <a:lstStyle/>
           <a:p>
             <a:pPr algn="ctr"/>
+            <a:endParaRPr/>
           </a:p>
         </p:txBody>
       </p:sp>
@@ -9971,6 +9189,7 @@
           <a:lstStyle/>
           <a:p>
             <a:pPr algn="ctr"/>
+            <a:endParaRPr/>
           </a:p>
         </p:txBody>
       </p:sp>
@@ -10017,8 +9236,8 @@
         </p:nvSpPr>
         <p:spPr>
           <a:xfrm>
-            <a:off x="10378440" y="6528816"/>
-            <a:ext cx="1371600" cy="292608"/>
+            <a:off x="10378440" y="6544315"/>
+            <a:ext cx="1371600" cy="261610"/>
           </a:xfrm>
           <a:prstGeom prst="rect">
             <a:avLst/>
@@ -10033,14 +9252,29 @@
           <a:p>
             <a:pPr algn="r"/>
             <a:r>
-              <a:rPr sz="1100" b="0">
+              <a:rPr sz="1100" b="0" dirty="0">
                 <a:solidFill>
                   <a:srgbClr val="FFFFFF"/>
                 </a:solidFill>
                 <a:latin typeface="Calibri"/>
               </a:rPr>
-              <a:t>5 / 15</a:t>
-            </a:r>
+              <a:t>5 / 1</a:t>
+            </a:r>
+            <a:r>
+              <a:rPr lang="es-419" sz="1100" b="0" dirty="0">
+                <a:solidFill>
+                  <a:srgbClr val="FFFFFF"/>
+                </a:solidFill>
+                <a:latin typeface="Calibri"/>
+              </a:rPr>
+              <a:t>3</a:t>
+            </a:r>
+            <a:endParaRPr sz="1100" b="0" dirty="0">
+              <a:solidFill>
+                <a:srgbClr val="FFFFFF"/>
+              </a:solidFill>
+              <a:latin typeface="Calibri"/>
+            </a:endParaRPr>
           </a:p>
         </p:txBody>
       </p:sp>
@@ -10119,6 +9353,7 @@
           <a:lstStyle/>
           <a:p>
             <a:pPr algn="ctr"/>
+            <a:endParaRPr/>
           </a:p>
         </p:txBody>
       </p:sp>
@@ -10201,6 +9436,7 @@
           <a:lstStyle/>
           <a:p>
             <a:pPr algn="ctr"/>
+            <a:endParaRPr/>
           </a:p>
         </p:txBody>
       </p:sp>
@@ -10318,6 +9554,7 @@
           <a:lstStyle/>
           <a:p>
             <a:pPr algn="ctr"/>
+            <a:endParaRPr/>
           </a:p>
         </p:txBody>
       </p:sp>
@@ -10435,6 +9672,7 @@
           <a:lstStyle/>
           <a:p>
             <a:pPr algn="ctr"/>
+            <a:endParaRPr/>
           </a:p>
         </p:txBody>
       </p:sp>
@@ -10552,6 +9790,7 @@
           <a:lstStyle/>
           <a:p>
             <a:pPr algn="ctr"/>
+            <a:endParaRPr/>
           </a:p>
         </p:txBody>
       </p:sp>
@@ -10669,6 +9908,7 @@
           <a:lstStyle/>
           <a:p>
             <a:pPr algn="ctr"/>
+            <a:endParaRPr/>
           </a:p>
         </p:txBody>
       </p:sp>
@@ -10751,7 +9991,7 @@
 </file>
 
 <file path=ppt/slides/slide6.xml><?xml version="1.0" encoding="utf-8"?>
-<p:sld xmlns:a="http://schemas.openxmlformats.org/drawingml/2006/main" xmlns:p="http://schemas.openxmlformats.org/presentationml/2006/main" xmlns:r="http://schemas.openxmlformats.org/officeDocument/2006/relationships">
+<p:sld xmlns:a="http://schemas.openxmlformats.org/drawingml/2006/main" xmlns:r="http://schemas.openxmlformats.org/officeDocument/2006/relationships" xmlns:p="http://schemas.openxmlformats.org/presentationml/2006/main">
   <p:cSld>
     <p:spTree>
       <p:nvGrpSpPr>
@@ -10759,7 +9999,14 @@
         <p:cNvGrpSpPr/>
         <p:nvPr/>
       </p:nvGrpSpPr>
-      <p:grpSpPr/>
+      <p:grpSpPr>
+        <a:xfrm>
+          <a:off x="0" y="0"/>
+          <a:ext cx="0" cy="0"/>
+          <a:chOff x="0" y="0"/>
+          <a:chExt cx="0" cy="0"/>
+        </a:xfrm>
+      </p:grpSpPr>
       <p:sp>
         <p:nvSpPr>
           <p:cNvPr id="2" name="Rectangle 1"/>
@@ -10800,6 +10047,7 @@
           <a:lstStyle/>
           <a:p>
             <a:pPr algn="ctr"/>
+            <a:endParaRPr/>
           </a:p>
         </p:txBody>
       </p:sp>
@@ -10843,6 +10091,7 @@
           <a:lstStyle/>
           <a:p>
             <a:pPr algn="ctr"/>
+            <a:endParaRPr/>
           </a:p>
         </p:txBody>
       </p:sp>
@@ -10886,6 +10135,7 @@
           <a:lstStyle/>
           <a:p>
             <a:pPr algn="ctr"/>
+            <a:endParaRPr/>
           </a:p>
         </p:txBody>
       </p:sp>
@@ -10932,8 +10182,8 @@
         </p:nvSpPr>
         <p:spPr>
           <a:xfrm>
-            <a:off x="10378440" y="6528816"/>
-            <a:ext cx="1371600" cy="292608"/>
+            <a:off x="10378440" y="6544315"/>
+            <a:ext cx="1371600" cy="261610"/>
           </a:xfrm>
           <a:prstGeom prst="rect">
             <a:avLst/>
@@ -10948,14 +10198,29 @@
           <a:p>
             <a:pPr algn="r"/>
             <a:r>
-              <a:rPr sz="1100" b="0">
+              <a:rPr sz="1100" b="0" dirty="0">
                 <a:solidFill>
                   <a:srgbClr val="FFFFFF"/>
                 </a:solidFill>
                 <a:latin typeface="Calibri"/>
               </a:rPr>
-              <a:t>6 / 15</a:t>
-            </a:r>
+              <a:t>6 / 1</a:t>
+            </a:r>
+            <a:r>
+              <a:rPr lang="es-419" sz="1100" b="0" dirty="0">
+                <a:solidFill>
+                  <a:srgbClr val="FFFFFF"/>
+                </a:solidFill>
+                <a:latin typeface="Calibri"/>
+              </a:rPr>
+              <a:t>3</a:t>
+            </a:r>
+            <a:endParaRPr sz="1100" b="0" dirty="0">
+              <a:solidFill>
+                <a:srgbClr val="FFFFFF"/>
+              </a:solidFill>
+              <a:latin typeface="Calibri"/>
+            </a:endParaRPr>
           </a:p>
         </p:txBody>
       </p:sp>
@@ -11034,6 +10299,7 @@
           <a:lstStyle/>
           <a:p>
             <a:pPr algn="ctr"/>
+            <a:endParaRPr/>
           </a:p>
         </p:txBody>
       </p:sp>
@@ -11116,6 +10382,7 @@
           <a:lstStyle/>
           <a:p>
             <a:pPr algn="ctr"/>
+            <a:endParaRPr/>
           </a:p>
         </p:txBody>
       </p:sp>
@@ -11233,6 +10500,7 @@
           <a:lstStyle/>
           <a:p>
             <a:pPr algn="ctr"/>
+            <a:endParaRPr/>
           </a:p>
         </p:txBody>
       </p:sp>
@@ -11385,6 +10653,7 @@
           <a:lstStyle/>
           <a:p>
             <a:pPr algn="ctr"/>
+            <a:endParaRPr/>
           </a:p>
         </p:txBody>
       </p:sp>
@@ -11502,6 +10771,7 @@
           <a:lstStyle/>
           <a:p>
             <a:pPr algn="ctr"/>
+            <a:endParaRPr/>
           </a:p>
         </p:txBody>
       </p:sp>
@@ -11636,7 +10906,7 @@
 </file>
 
 <file path=ppt/slides/slide7.xml><?xml version="1.0" encoding="utf-8"?>
-<p:sld xmlns:a="http://schemas.openxmlformats.org/drawingml/2006/main" xmlns:p="http://schemas.openxmlformats.org/presentationml/2006/main" xmlns:r="http://schemas.openxmlformats.org/officeDocument/2006/relationships">
+<p:sld xmlns:a="http://schemas.openxmlformats.org/drawingml/2006/main" xmlns:r="http://schemas.openxmlformats.org/officeDocument/2006/relationships" xmlns:p="http://schemas.openxmlformats.org/presentationml/2006/main">
   <p:cSld>
     <p:spTree>
       <p:nvGrpSpPr>
@@ -11644,7 +10914,14 @@
         <p:cNvGrpSpPr/>
         <p:nvPr/>
       </p:nvGrpSpPr>
-      <p:grpSpPr/>
+      <p:grpSpPr>
+        <a:xfrm>
+          <a:off x="0" y="0"/>
+          <a:ext cx="0" cy="0"/>
+          <a:chOff x="0" y="0"/>
+          <a:chExt cx="0" cy="0"/>
+        </a:xfrm>
+      </p:grpSpPr>
       <p:sp>
         <p:nvSpPr>
           <p:cNvPr id="2" name="Rectangle 1"/>
@@ -11685,6 +10962,7 @@
           <a:lstStyle/>
           <a:p>
             <a:pPr algn="ctr"/>
+            <a:endParaRPr/>
           </a:p>
         </p:txBody>
       </p:sp>
@@ -11728,6 +11006,7 @@
           <a:lstStyle/>
           <a:p>
             <a:pPr algn="ctr"/>
+            <a:endParaRPr/>
           </a:p>
         </p:txBody>
       </p:sp>
@@ -11771,6 +11050,7 @@
           <a:lstStyle/>
           <a:p>
             <a:pPr algn="ctr"/>
+            <a:endParaRPr/>
           </a:p>
         </p:txBody>
       </p:sp>
@@ -11817,8 +11097,8 @@
         </p:nvSpPr>
         <p:spPr>
           <a:xfrm>
-            <a:off x="10378440" y="6528816"/>
-            <a:ext cx="1371600" cy="292608"/>
+            <a:off x="10378440" y="6544315"/>
+            <a:ext cx="1371600" cy="261610"/>
           </a:xfrm>
           <a:prstGeom prst="rect">
             <a:avLst/>
@@ -11833,14 +11113,29 @@
           <a:p>
             <a:pPr algn="r"/>
             <a:r>
-              <a:rPr sz="1100" b="0">
+              <a:rPr sz="1100" b="0" dirty="0">
                 <a:solidFill>
                   <a:srgbClr val="FFFFFF"/>
                 </a:solidFill>
                 <a:latin typeface="Calibri"/>
               </a:rPr>
-              <a:t>7 / 15</a:t>
-            </a:r>
+              <a:t>7 / 1</a:t>
+            </a:r>
+            <a:r>
+              <a:rPr lang="es-419" sz="1100" b="0" dirty="0">
+                <a:solidFill>
+                  <a:srgbClr val="FFFFFF"/>
+                </a:solidFill>
+                <a:latin typeface="Calibri"/>
+              </a:rPr>
+              <a:t>3</a:t>
+            </a:r>
+            <a:endParaRPr sz="1100" b="0" dirty="0">
+              <a:solidFill>
+                <a:srgbClr val="FFFFFF"/>
+              </a:solidFill>
+              <a:latin typeface="Calibri"/>
+            </a:endParaRPr>
           </a:p>
         </p:txBody>
       </p:sp>
@@ -11919,6 +11214,7 @@
           <a:lstStyle/>
           <a:p>
             <a:pPr algn="ctr"/>
+            <a:endParaRPr/>
           </a:p>
         </p:txBody>
       </p:sp>
@@ -12001,6 +11297,7 @@
           <a:lstStyle/>
           <a:p>
             <a:pPr algn="ctr"/>
+            <a:endParaRPr/>
           </a:p>
         </p:txBody>
       </p:sp>
@@ -12186,6 +11483,7 @@
           <a:lstStyle/>
           <a:p>
             <a:pPr algn="ctr"/>
+            <a:endParaRPr/>
           </a:p>
         </p:txBody>
       </p:sp>
@@ -12315,15 +11613,12 @@
                 <a:spcPts val="1100"/>
               </a:spcAft>
             </a:pPr>
-            <a:r>
-              <a:rPr sz="1600" b="0">
-                <a:solidFill>
-                  <a:srgbClr val="2C3E50"/>
-                </a:solidFill>
-                <a:latin typeface="Calibri"/>
-              </a:rPr>
-              <a:t/>
-            </a:r>
+            <a:endParaRPr sz="1600" b="0">
+              <a:solidFill>
+                <a:srgbClr val="2C3E50"/>
+              </a:solidFill>
+              <a:latin typeface="Calibri"/>
+            </a:endParaRPr>
           </a:p>
           <a:p>
             <a:pPr>
@@ -12352,7 +11647,7 @@
 </file>
 
 <file path=ppt/slides/slide8.xml><?xml version="1.0" encoding="utf-8"?>
-<p:sld xmlns:a="http://schemas.openxmlformats.org/drawingml/2006/main" xmlns:p="http://schemas.openxmlformats.org/presentationml/2006/main" xmlns:r="http://schemas.openxmlformats.org/officeDocument/2006/relationships">
+<p:sld xmlns:a="http://schemas.openxmlformats.org/drawingml/2006/main" xmlns:r="http://schemas.openxmlformats.org/officeDocument/2006/relationships" xmlns:p="http://schemas.openxmlformats.org/presentationml/2006/main">
   <p:cSld>
     <p:spTree>
       <p:nvGrpSpPr>
@@ -12360,7 +11655,14 @@
         <p:cNvGrpSpPr/>
         <p:nvPr/>
       </p:nvGrpSpPr>
-      <p:grpSpPr/>
+      <p:grpSpPr>
+        <a:xfrm>
+          <a:off x="0" y="0"/>
+          <a:ext cx="0" cy="0"/>
+          <a:chOff x="0" y="0"/>
+          <a:chExt cx="0" cy="0"/>
+        </a:xfrm>
+      </p:grpSpPr>
       <p:sp>
         <p:nvSpPr>
           <p:cNvPr id="2" name="Rectangle 1"/>
@@ -12401,6 +11703,7 @@
           <a:lstStyle/>
           <a:p>
             <a:pPr algn="ctr"/>
+            <a:endParaRPr/>
           </a:p>
         </p:txBody>
       </p:sp>
@@ -12444,6 +11747,7 @@
           <a:lstStyle/>
           <a:p>
             <a:pPr algn="ctr"/>
+            <a:endParaRPr/>
           </a:p>
         </p:txBody>
       </p:sp>
@@ -12487,6 +11791,7 @@
           <a:lstStyle/>
           <a:p>
             <a:pPr algn="ctr"/>
+            <a:endParaRPr/>
           </a:p>
         </p:txBody>
       </p:sp>
@@ -12533,8 +11838,8 @@
         </p:nvSpPr>
         <p:spPr>
           <a:xfrm>
-            <a:off x="10378440" y="6528816"/>
-            <a:ext cx="1371600" cy="292608"/>
+            <a:off x="10378440" y="6544315"/>
+            <a:ext cx="1371600" cy="261610"/>
           </a:xfrm>
           <a:prstGeom prst="rect">
             <a:avLst/>
@@ -12549,14 +11854,29 @@
           <a:p>
             <a:pPr algn="r"/>
             <a:r>
-              <a:rPr sz="1100" b="0">
+              <a:rPr sz="1100" b="0" dirty="0">
                 <a:solidFill>
                   <a:srgbClr val="FFFFFF"/>
                 </a:solidFill>
                 <a:latin typeface="Calibri"/>
               </a:rPr>
-              <a:t>8 / 15</a:t>
-            </a:r>
+              <a:t>8 / 1</a:t>
+            </a:r>
+            <a:r>
+              <a:rPr lang="es-419" sz="1100" b="0" dirty="0">
+                <a:solidFill>
+                  <a:srgbClr val="FFFFFF"/>
+                </a:solidFill>
+                <a:latin typeface="Calibri"/>
+              </a:rPr>
+              <a:t>3</a:t>
+            </a:r>
+            <a:endParaRPr sz="1100" b="0" dirty="0">
+              <a:solidFill>
+                <a:srgbClr val="FFFFFF"/>
+              </a:solidFill>
+              <a:latin typeface="Calibri"/>
+            </a:endParaRPr>
           </a:p>
         </p:txBody>
       </p:sp>
@@ -12635,6 +11955,7 @@
           <a:lstStyle/>
           <a:p>
             <a:pPr algn="ctr"/>
+            <a:endParaRPr/>
           </a:p>
         </p:txBody>
       </p:sp>
@@ -12717,6 +12038,7 @@
           <a:lstStyle/>
           <a:p>
             <a:pPr algn="ctr"/>
+            <a:endParaRPr/>
           </a:p>
         </p:txBody>
       </p:sp>
@@ -12848,7 +12170,7 @@
 </file>
 
 <file path=ppt/slides/slide9.xml><?xml version="1.0" encoding="utf-8"?>
-<p:sld xmlns:a="http://schemas.openxmlformats.org/drawingml/2006/main" xmlns:p="http://schemas.openxmlformats.org/presentationml/2006/main" xmlns:r="http://schemas.openxmlformats.org/officeDocument/2006/relationships">
+<p:sld xmlns:a="http://schemas.openxmlformats.org/drawingml/2006/main" xmlns:r="http://schemas.openxmlformats.org/officeDocument/2006/relationships" xmlns:p="http://schemas.openxmlformats.org/presentationml/2006/main">
   <p:cSld>
     <p:spTree>
       <p:nvGrpSpPr>
@@ -12856,7 +12178,14 @@
         <p:cNvGrpSpPr/>
         <p:nvPr/>
       </p:nvGrpSpPr>
-      <p:grpSpPr/>
+      <p:grpSpPr>
+        <a:xfrm>
+          <a:off x="0" y="0"/>
+          <a:ext cx="0" cy="0"/>
+          <a:chOff x="0" y="0"/>
+          <a:chExt cx="0" cy="0"/>
+        </a:xfrm>
+      </p:grpSpPr>
       <p:sp>
         <p:nvSpPr>
           <p:cNvPr id="2" name="Rectangle 1"/>
@@ -12897,6 +12226,7 @@
           <a:lstStyle/>
           <a:p>
             <a:pPr algn="ctr"/>
+            <a:endParaRPr/>
           </a:p>
         </p:txBody>
       </p:sp>
@@ -12940,6 +12270,7 @@
           <a:lstStyle/>
           <a:p>
             <a:pPr algn="ctr"/>
+            <a:endParaRPr/>
           </a:p>
         </p:txBody>
       </p:sp>
@@ -12983,6 +12314,7 @@
           <a:lstStyle/>
           <a:p>
             <a:pPr algn="ctr"/>
+            <a:endParaRPr/>
           </a:p>
         </p:txBody>
       </p:sp>
@@ -13029,8 +12361,8 @@
         </p:nvSpPr>
         <p:spPr>
           <a:xfrm>
-            <a:off x="10378440" y="6528816"/>
-            <a:ext cx="1371600" cy="292608"/>
+            <a:off x="10378440" y="6544315"/>
+            <a:ext cx="1371600" cy="261610"/>
           </a:xfrm>
           <a:prstGeom prst="rect">
             <a:avLst/>
@@ -13045,14 +12377,29 @@
           <a:p>
             <a:pPr algn="r"/>
             <a:r>
-              <a:rPr sz="1100" b="0">
+              <a:rPr sz="1100" b="0" dirty="0">
                 <a:solidFill>
                   <a:srgbClr val="FFFFFF"/>
                 </a:solidFill>
                 <a:latin typeface="Calibri"/>
               </a:rPr>
-              <a:t>9 / 15</a:t>
-            </a:r>
+              <a:t>9 / 1</a:t>
+            </a:r>
+            <a:r>
+              <a:rPr lang="es-419" sz="1100" b="0" dirty="0">
+                <a:solidFill>
+                  <a:srgbClr val="FFFFFF"/>
+                </a:solidFill>
+                <a:latin typeface="Calibri"/>
+              </a:rPr>
+              <a:t>3</a:t>
+            </a:r>
+            <a:endParaRPr sz="1100" b="0" dirty="0">
+              <a:solidFill>
+                <a:srgbClr val="FFFFFF"/>
+              </a:solidFill>
+              <a:latin typeface="Calibri"/>
+            </a:endParaRPr>
           </a:p>
         </p:txBody>
       </p:sp>
@@ -13131,6 +12478,7 @@
           <a:lstStyle/>
           <a:p>
             <a:pPr algn="ctr"/>
+            <a:endParaRPr/>
           </a:p>
         </p:txBody>
       </p:sp>
@@ -13213,6 +12561,7 @@
           <a:lstStyle/>
           <a:p>
             <a:pPr algn="ctr"/>
+            <a:endParaRPr/>
           </a:p>
         </p:txBody>
       </p:sp>
